--- a/docs/pptx/whole/ritu-linsubhr-sens-anemia3.pptx
+++ b/docs/pptx/whole/ritu-linsubhr-sens-anemia3.pptx
@@ -2443,7 +2443,7 @@
           </p:nvSpPr>
           <p:spPr>
             <a:xfrm>
-              <a:off x="2520195" y="2073503"/>
+              <a:off x="2520043" y="2073503"/>
               <a:ext cx="0" cy="3649639"/>
             </a:xfrm>
             <a:custGeom>
@@ -2486,7 +2486,7 @@
           </p:nvSpPr>
           <p:spPr>
             <a:xfrm>
-              <a:off x="4326850" y="2073503"/>
+              <a:off x="4325074" y="2073503"/>
               <a:ext cx="0" cy="3649639"/>
             </a:xfrm>
             <a:custGeom>
@@ -2529,7 +2529,7 @@
           </p:nvSpPr>
           <p:spPr>
             <a:xfrm>
-              <a:off x="6133505" y="2073503"/>
+              <a:off x="6130105" y="2073503"/>
               <a:ext cx="0" cy="3649639"/>
             </a:xfrm>
             <a:custGeom>
@@ -2572,7 +2572,7 @@
           </p:nvSpPr>
           <p:spPr>
             <a:xfrm>
-              <a:off x="7940161" y="2073503"/>
+              <a:off x="7935136" y="2073503"/>
               <a:ext cx="0" cy="3649639"/>
             </a:xfrm>
             <a:custGeom>
@@ -2830,7 +2830,7 @@
           </p:nvSpPr>
           <p:spPr>
             <a:xfrm>
-              <a:off x="1616868" y="2073503"/>
+              <a:off x="1617528" y="2073503"/>
               <a:ext cx="0" cy="3649639"/>
             </a:xfrm>
             <a:custGeom>
@@ -2873,7 +2873,7 @@
           </p:nvSpPr>
           <p:spPr>
             <a:xfrm>
-              <a:off x="3423523" y="2073503"/>
+              <a:off x="3422559" y="2073503"/>
               <a:ext cx="0" cy="3649639"/>
             </a:xfrm>
             <a:custGeom>
@@ -2916,7 +2916,7 @@
           </p:nvSpPr>
           <p:spPr>
             <a:xfrm>
-              <a:off x="5230178" y="2073503"/>
+              <a:off x="5227590" y="2073503"/>
               <a:ext cx="0" cy="3649639"/>
             </a:xfrm>
             <a:custGeom>
@@ -2959,7 +2959,7 @@
           </p:nvSpPr>
           <p:spPr>
             <a:xfrm>
-              <a:off x="7036833" y="2073503"/>
+              <a:off x="7032620" y="2073503"/>
               <a:ext cx="0" cy="3649639"/>
             </a:xfrm>
             <a:custGeom>
@@ -3003,581 +3003,581 @@
           <p:spPr>
             <a:xfrm>
               <a:off x="1172049" y="2073503"/>
-              <a:ext cx="7090630" cy="3397321"/>
+              <a:ext cx="7090630" cy="3397139"/>
             </a:xfrm>
             <a:custGeom>
               <a:avLst/>
               <a:pathLst>
-                <a:path w="7090630" h="3397321">
+                <a:path w="7090630" h="3397139">
                   <a:moveTo>
-                    <a:pt x="717793" y="0"/>
+                    <a:pt x="722620" y="0"/>
                   </a:moveTo>
                   <a:lnTo>
-                    <a:pt x="787847" y="138785"/>
-                  </a:lnTo>
-                  <a:lnTo>
-                    <a:pt x="859470" y="274903"/>
-                  </a:lnTo>
-                  <a:lnTo>
-                    <a:pt x="931092" y="405482"/>
-                  </a:lnTo>
-                  <a:lnTo>
-                    <a:pt x="1002715" y="530747"/>
-                  </a:lnTo>
-                  <a:lnTo>
-                    <a:pt x="1074337" y="650915"/>
-                  </a:lnTo>
-                  <a:lnTo>
-                    <a:pt x="1145960" y="766193"/>
-                  </a:lnTo>
-                  <a:lnTo>
-                    <a:pt x="1217582" y="876779"/>
-                  </a:lnTo>
-                  <a:lnTo>
-                    <a:pt x="1289205" y="982866"/>
-                  </a:lnTo>
-                  <a:lnTo>
-                    <a:pt x="1360827" y="1084635"/>
-                  </a:lnTo>
-                  <a:lnTo>
-                    <a:pt x="1432450" y="1182264"/>
-                  </a:lnTo>
-                  <a:lnTo>
-                    <a:pt x="1504073" y="1275919"/>
-                  </a:lnTo>
-                  <a:lnTo>
-                    <a:pt x="1575695" y="1365763"/>
-                  </a:lnTo>
-                  <a:lnTo>
-                    <a:pt x="1647318" y="1451951"/>
-                  </a:lnTo>
-                  <a:lnTo>
-                    <a:pt x="1718940" y="1534632"/>
-                  </a:lnTo>
-                  <a:lnTo>
-                    <a:pt x="1790563" y="1613948"/>
-                  </a:lnTo>
-                  <a:lnTo>
-                    <a:pt x="1862185" y="1690037"/>
-                  </a:lnTo>
-                  <a:lnTo>
-                    <a:pt x="1933808" y="1763029"/>
-                  </a:lnTo>
-                  <a:lnTo>
-                    <a:pt x="2005430" y="1833051"/>
-                  </a:lnTo>
-                  <a:lnTo>
-                    <a:pt x="2077053" y="1900224"/>
-                  </a:lnTo>
-                  <a:lnTo>
-                    <a:pt x="2148675" y="1964663"/>
-                  </a:lnTo>
-                  <a:lnTo>
-                    <a:pt x="2220298" y="2026479"/>
-                  </a:lnTo>
-                  <a:lnTo>
-                    <a:pt x="2291920" y="2085781"/>
-                  </a:lnTo>
-                  <a:lnTo>
-                    <a:pt x="2363543" y="2142669"/>
-                  </a:lnTo>
-                  <a:lnTo>
-                    <a:pt x="2435165" y="2197242"/>
-                  </a:lnTo>
-                  <a:lnTo>
-                    <a:pt x="2506788" y="2249594"/>
-                  </a:lnTo>
-                  <a:lnTo>
-                    <a:pt x="2578410" y="2299816"/>
-                  </a:lnTo>
-                  <a:lnTo>
-                    <a:pt x="2650033" y="2347994"/>
-                  </a:lnTo>
-                  <a:lnTo>
-                    <a:pt x="2721655" y="2394212"/>
-                  </a:lnTo>
-                  <a:lnTo>
-                    <a:pt x="2793278" y="2438549"/>
-                  </a:lnTo>
-                  <a:lnTo>
-                    <a:pt x="2864901" y="2481082"/>
-                  </a:lnTo>
-                  <a:lnTo>
-                    <a:pt x="2936523" y="2521884"/>
-                  </a:lnTo>
-                  <a:lnTo>
-                    <a:pt x="3008146" y="2561025"/>
-                  </a:lnTo>
-                  <a:lnTo>
-                    <a:pt x="3079768" y="2598574"/>
-                  </a:lnTo>
-                  <a:lnTo>
-                    <a:pt x="3151391" y="2634595"/>
-                  </a:lnTo>
-                  <a:lnTo>
-                    <a:pt x="3223013" y="2655816"/>
-                  </a:lnTo>
-                  <a:lnTo>
-                    <a:pt x="3294636" y="2659326"/>
-                  </a:lnTo>
-                  <a:lnTo>
-                    <a:pt x="3366258" y="2662822"/>
-                  </a:lnTo>
-                  <a:lnTo>
-                    <a:pt x="3437881" y="2666303"/>
-                  </a:lnTo>
-                  <a:lnTo>
-                    <a:pt x="3509503" y="2669769"/>
-                  </a:lnTo>
-                  <a:lnTo>
-                    <a:pt x="3581126" y="2673220"/>
-                  </a:lnTo>
-                  <a:lnTo>
-                    <a:pt x="3652748" y="2676657"/>
-                  </a:lnTo>
-                  <a:lnTo>
-                    <a:pt x="3724371" y="2680079"/>
-                  </a:lnTo>
-                  <a:lnTo>
-                    <a:pt x="3795993" y="2683486"/>
-                  </a:lnTo>
-                  <a:lnTo>
-                    <a:pt x="3867616" y="2686879"/>
-                  </a:lnTo>
-                  <a:lnTo>
-                    <a:pt x="3939238" y="2690258"/>
-                  </a:lnTo>
-                  <a:lnTo>
-                    <a:pt x="4010861" y="2693623"/>
-                  </a:lnTo>
-                  <a:lnTo>
-                    <a:pt x="4082483" y="2696973"/>
-                  </a:lnTo>
-                  <a:lnTo>
-                    <a:pt x="4154106" y="2700309"/>
-                  </a:lnTo>
-                  <a:lnTo>
-                    <a:pt x="4225729" y="2703630"/>
-                  </a:lnTo>
-                  <a:lnTo>
-                    <a:pt x="4297351" y="2706938"/>
-                  </a:lnTo>
-                  <a:lnTo>
-                    <a:pt x="4368974" y="2710232"/>
-                  </a:lnTo>
-                  <a:lnTo>
-                    <a:pt x="4440596" y="2713512"/>
-                  </a:lnTo>
-                  <a:lnTo>
-                    <a:pt x="4512219" y="2716777"/>
-                  </a:lnTo>
-                  <a:lnTo>
-                    <a:pt x="4583841" y="2720029"/>
-                  </a:lnTo>
-                  <a:lnTo>
-                    <a:pt x="4655464" y="2723268"/>
-                  </a:lnTo>
-                  <a:lnTo>
-                    <a:pt x="4727086" y="2726492"/>
-                  </a:lnTo>
-                  <a:lnTo>
-                    <a:pt x="4798709" y="2729703"/>
-                  </a:lnTo>
-                  <a:lnTo>
-                    <a:pt x="4870331" y="2732900"/>
-                  </a:lnTo>
-                  <a:lnTo>
-                    <a:pt x="4941954" y="2736084"/>
-                  </a:lnTo>
-                  <a:lnTo>
-                    <a:pt x="5013576" y="2739254"/>
-                  </a:lnTo>
-                  <a:lnTo>
-                    <a:pt x="5085199" y="2742411"/>
-                  </a:lnTo>
-                  <a:lnTo>
-                    <a:pt x="5156821" y="2745554"/>
-                  </a:lnTo>
-                  <a:lnTo>
-                    <a:pt x="5228444" y="2748684"/>
-                  </a:lnTo>
-                  <a:lnTo>
-                    <a:pt x="5300066" y="2751800"/>
-                  </a:lnTo>
-                  <a:lnTo>
-                    <a:pt x="5371689" y="2754904"/>
-                  </a:lnTo>
-                  <a:lnTo>
-                    <a:pt x="5443311" y="2757994"/>
-                  </a:lnTo>
-                  <a:lnTo>
-                    <a:pt x="5514934" y="2761072"/>
-                  </a:lnTo>
-                  <a:lnTo>
-                    <a:pt x="5586557" y="2764136"/>
-                  </a:lnTo>
-                  <a:lnTo>
-                    <a:pt x="5658179" y="2767187"/>
-                  </a:lnTo>
-                  <a:lnTo>
-                    <a:pt x="5729802" y="2770225"/>
-                  </a:lnTo>
-                  <a:lnTo>
-                    <a:pt x="5801424" y="2773250"/>
-                  </a:lnTo>
-                  <a:lnTo>
-                    <a:pt x="5873047" y="2776263"/>
-                  </a:lnTo>
-                  <a:lnTo>
-                    <a:pt x="5944669" y="2779263"/>
-                  </a:lnTo>
-                  <a:lnTo>
-                    <a:pt x="6016292" y="2782250"/>
-                  </a:lnTo>
-                  <a:lnTo>
-                    <a:pt x="6087914" y="2785224"/>
-                  </a:lnTo>
-                  <a:lnTo>
-                    <a:pt x="6159537" y="2788186"/>
-                  </a:lnTo>
-                  <a:lnTo>
-                    <a:pt x="6231159" y="2791135"/>
-                  </a:lnTo>
-                  <a:lnTo>
-                    <a:pt x="6302782" y="2794072"/>
-                  </a:lnTo>
-                  <a:lnTo>
-                    <a:pt x="6374404" y="2796996"/>
-                  </a:lnTo>
-                  <a:lnTo>
-                    <a:pt x="6446027" y="2799908"/>
-                  </a:lnTo>
-                  <a:lnTo>
-                    <a:pt x="6517649" y="2802807"/>
-                  </a:lnTo>
-                  <a:lnTo>
-                    <a:pt x="6589272" y="2805695"/>
-                  </a:lnTo>
-                  <a:lnTo>
-                    <a:pt x="6660894" y="2808570"/>
-                  </a:lnTo>
-                  <a:lnTo>
-                    <a:pt x="6732517" y="2811432"/>
-                  </a:lnTo>
-                  <a:lnTo>
-                    <a:pt x="6804139" y="2814283"/>
-                  </a:lnTo>
-                  <a:lnTo>
-                    <a:pt x="6875762" y="2817122"/>
-                  </a:lnTo>
-                  <a:lnTo>
-                    <a:pt x="6947385" y="2819948"/>
-                  </a:lnTo>
-                  <a:lnTo>
-                    <a:pt x="7019007" y="2822763"/>
-                  </a:lnTo>
-                  <a:lnTo>
-                    <a:pt x="7090630" y="2825565"/>
-                  </a:lnTo>
-                  <a:lnTo>
-                    <a:pt x="7090630" y="3397321"/>
-                  </a:lnTo>
-                  <a:lnTo>
-                    <a:pt x="7019007" y="3393655"/>
-                  </a:lnTo>
-                  <a:lnTo>
-                    <a:pt x="6947385" y="3389833"/>
-                  </a:lnTo>
-                  <a:lnTo>
-                    <a:pt x="6875762" y="3385849"/>
-                  </a:lnTo>
-                  <a:lnTo>
-                    <a:pt x="6804139" y="3381696"/>
-                  </a:lnTo>
-                  <a:lnTo>
-                    <a:pt x="6732517" y="3377368"/>
-                  </a:lnTo>
-                  <a:lnTo>
-                    <a:pt x="6660894" y="3372855"/>
-                  </a:lnTo>
-                  <a:lnTo>
-                    <a:pt x="6589272" y="3368151"/>
-                  </a:lnTo>
-                  <a:lnTo>
-                    <a:pt x="6517649" y="3363247"/>
-                  </a:lnTo>
-                  <a:lnTo>
-                    <a:pt x="6446027" y="3358136"/>
-                  </a:lnTo>
-                  <a:lnTo>
-                    <a:pt x="6374404" y="3352808"/>
-                  </a:lnTo>
-                  <a:lnTo>
-                    <a:pt x="6302782" y="3347253"/>
-                  </a:lnTo>
-                  <a:lnTo>
-                    <a:pt x="6231159" y="3341463"/>
-                  </a:lnTo>
-                  <a:lnTo>
-                    <a:pt x="6159537" y="3335428"/>
-                  </a:lnTo>
-                  <a:lnTo>
-                    <a:pt x="6087914" y="3329136"/>
-                  </a:lnTo>
-                  <a:lnTo>
-                    <a:pt x="6016292" y="3322577"/>
-                  </a:lnTo>
-                  <a:lnTo>
-                    <a:pt x="5944669" y="3315741"/>
-                  </a:lnTo>
-                  <a:lnTo>
-                    <a:pt x="5873047" y="3308614"/>
-                  </a:lnTo>
-                  <a:lnTo>
-                    <a:pt x="5801424" y="3301185"/>
-                  </a:lnTo>
-                  <a:lnTo>
-                    <a:pt x="5729802" y="3293441"/>
-                  </a:lnTo>
-                  <a:lnTo>
-                    <a:pt x="5658179" y="3285368"/>
-                  </a:lnTo>
-                  <a:lnTo>
-                    <a:pt x="5586557" y="3276953"/>
-                  </a:lnTo>
-                  <a:lnTo>
-                    <a:pt x="5514934" y="3268181"/>
-                  </a:lnTo>
-                  <a:lnTo>
-                    <a:pt x="5443311" y="3259037"/>
-                  </a:lnTo>
-                  <a:lnTo>
-                    <a:pt x="5371689" y="3249504"/>
-                  </a:lnTo>
-                  <a:lnTo>
-                    <a:pt x="5300066" y="3239568"/>
-                  </a:lnTo>
-                  <a:lnTo>
-                    <a:pt x="5228444" y="3229210"/>
-                  </a:lnTo>
-                  <a:lnTo>
-                    <a:pt x="5156821" y="3218413"/>
-                  </a:lnTo>
-                  <a:lnTo>
-                    <a:pt x="5085199" y="3207157"/>
-                  </a:lnTo>
-                  <a:lnTo>
-                    <a:pt x="5013576" y="3195424"/>
-                  </a:lnTo>
-                  <a:lnTo>
-                    <a:pt x="4941954" y="3183194"/>
-                  </a:lnTo>
-                  <a:lnTo>
-                    <a:pt x="4870331" y="3170445"/>
-                  </a:lnTo>
-                  <a:lnTo>
-                    <a:pt x="4798709" y="3157154"/>
-                  </a:lnTo>
-                  <a:lnTo>
-                    <a:pt x="4727086" y="3143300"/>
-                  </a:lnTo>
-                  <a:lnTo>
-                    <a:pt x="4655464" y="3128859"/>
-                  </a:lnTo>
-                  <a:lnTo>
-                    <a:pt x="4583841" y="3113805"/>
-                  </a:lnTo>
-                  <a:lnTo>
-                    <a:pt x="4512219" y="3098112"/>
-                  </a:lnTo>
-                  <a:lnTo>
-                    <a:pt x="4440596" y="3081753"/>
-                  </a:lnTo>
-                  <a:lnTo>
-                    <a:pt x="4368974" y="3064701"/>
-                  </a:lnTo>
-                  <a:lnTo>
-                    <a:pt x="4297351" y="3046925"/>
-                  </a:lnTo>
-                  <a:lnTo>
-                    <a:pt x="4225729" y="3028395"/>
-                  </a:lnTo>
-                  <a:lnTo>
-                    <a:pt x="4154106" y="3009079"/>
-                  </a:lnTo>
-                  <a:lnTo>
-                    <a:pt x="4082483" y="2988944"/>
-                  </a:lnTo>
-                  <a:lnTo>
-                    <a:pt x="4010861" y="2967955"/>
-                  </a:lnTo>
-                  <a:lnTo>
-                    <a:pt x="3939238" y="2946075"/>
-                  </a:lnTo>
-                  <a:lnTo>
-                    <a:pt x="3867616" y="2923267"/>
-                  </a:lnTo>
-                  <a:lnTo>
-                    <a:pt x="3795993" y="2899492"/>
-                  </a:lnTo>
-                  <a:lnTo>
-                    <a:pt x="3724371" y="2874708"/>
-                  </a:lnTo>
-                  <a:lnTo>
-                    <a:pt x="3652748" y="2848873"/>
-                  </a:lnTo>
-                  <a:lnTo>
-                    <a:pt x="3581126" y="2821942"/>
-                  </a:lnTo>
-                  <a:lnTo>
-                    <a:pt x="3509503" y="2793868"/>
-                  </a:lnTo>
-                  <a:lnTo>
-                    <a:pt x="3437881" y="2764604"/>
-                  </a:lnTo>
-                  <a:lnTo>
-                    <a:pt x="3366258" y="2734098"/>
-                  </a:lnTo>
-                  <a:lnTo>
-                    <a:pt x="3294636" y="2702298"/>
-                  </a:lnTo>
-                  <a:lnTo>
-                    <a:pt x="3223013" y="2669149"/>
-                  </a:lnTo>
-                  <a:lnTo>
-                    <a:pt x="3151391" y="2652290"/>
-                  </a:lnTo>
-                  <a:lnTo>
-                    <a:pt x="3079768" y="2648750"/>
-                  </a:lnTo>
-                  <a:lnTo>
-                    <a:pt x="3008146" y="2645194"/>
-                  </a:lnTo>
-                  <a:lnTo>
-                    <a:pt x="2936523" y="2641624"/>
-                  </a:lnTo>
-                  <a:lnTo>
-                    <a:pt x="2864901" y="2638038"/>
-                  </a:lnTo>
-                  <a:lnTo>
-                    <a:pt x="2793278" y="2634437"/>
-                  </a:lnTo>
-                  <a:lnTo>
-                    <a:pt x="2721655" y="2630820"/>
-                  </a:lnTo>
-                  <a:lnTo>
-                    <a:pt x="2650033" y="2627189"/>
-                  </a:lnTo>
-                  <a:lnTo>
-                    <a:pt x="2578410" y="2623541"/>
-                  </a:lnTo>
-                  <a:lnTo>
-                    <a:pt x="2506788" y="2619878"/>
-                  </a:lnTo>
-                  <a:lnTo>
-                    <a:pt x="2435165" y="2616200"/>
-                  </a:lnTo>
-                  <a:lnTo>
-                    <a:pt x="2363543" y="2612506"/>
-                  </a:lnTo>
-                  <a:lnTo>
-                    <a:pt x="2291920" y="2608796"/>
-                  </a:lnTo>
-                  <a:lnTo>
-                    <a:pt x="2220298" y="2605070"/>
-                  </a:lnTo>
-                  <a:lnTo>
-                    <a:pt x="2148675" y="2601329"/>
-                  </a:lnTo>
-                  <a:lnTo>
-                    <a:pt x="2077053" y="2597571"/>
-                  </a:lnTo>
-                  <a:lnTo>
-                    <a:pt x="2005430" y="2593798"/>
-                  </a:lnTo>
-                  <a:lnTo>
-                    <a:pt x="1933808" y="2590009"/>
-                  </a:lnTo>
-                  <a:lnTo>
-                    <a:pt x="1862185" y="2586203"/>
-                  </a:lnTo>
-                  <a:lnTo>
-                    <a:pt x="1790563" y="2582381"/>
-                  </a:lnTo>
-                  <a:lnTo>
-                    <a:pt x="1718940" y="2578543"/>
-                  </a:lnTo>
-                  <a:lnTo>
-                    <a:pt x="1647318" y="2574689"/>
-                  </a:lnTo>
-                  <a:lnTo>
-                    <a:pt x="1575695" y="2570818"/>
-                  </a:lnTo>
-                  <a:lnTo>
-                    <a:pt x="1504073" y="2566930"/>
-                  </a:lnTo>
-                  <a:lnTo>
-                    <a:pt x="1432450" y="2563026"/>
-                  </a:lnTo>
-                  <a:lnTo>
-                    <a:pt x="1360827" y="2559106"/>
-                  </a:lnTo>
-                  <a:lnTo>
-                    <a:pt x="1289205" y="2555169"/>
-                  </a:lnTo>
-                  <a:lnTo>
-                    <a:pt x="1217582" y="2551215"/>
-                  </a:lnTo>
-                  <a:lnTo>
-                    <a:pt x="1145960" y="2547244"/>
-                  </a:lnTo>
-                  <a:lnTo>
-                    <a:pt x="1074337" y="2543256"/>
-                  </a:lnTo>
-                  <a:lnTo>
-                    <a:pt x="1002715" y="2539252"/>
-                  </a:lnTo>
-                  <a:lnTo>
-                    <a:pt x="931092" y="2535230"/>
-                  </a:lnTo>
-                  <a:lnTo>
-                    <a:pt x="859470" y="2531191"/>
-                  </a:lnTo>
-                  <a:lnTo>
-                    <a:pt x="787847" y="2527135"/>
-                  </a:lnTo>
-                  <a:lnTo>
-                    <a:pt x="716225" y="2523061"/>
-                  </a:lnTo>
-                  <a:lnTo>
-                    <a:pt x="644602" y="2518971"/>
-                  </a:lnTo>
-                  <a:lnTo>
-                    <a:pt x="572980" y="2514863"/>
-                  </a:lnTo>
-                  <a:lnTo>
-                    <a:pt x="501357" y="2510737"/>
-                  </a:lnTo>
-                  <a:lnTo>
-                    <a:pt x="429735" y="2506594"/>
-                  </a:lnTo>
-                  <a:lnTo>
-                    <a:pt x="358112" y="2502433"/>
-                  </a:lnTo>
-                  <a:lnTo>
-                    <a:pt x="286490" y="2498255"/>
-                  </a:lnTo>
-                  <a:lnTo>
-                    <a:pt x="214867" y="2494058"/>
-                  </a:lnTo>
-                  <a:lnTo>
-                    <a:pt x="143245" y="2489844"/>
-                  </a:lnTo>
-                  <a:lnTo>
-                    <a:pt x="71622" y="2485612"/>
-                  </a:lnTo>
-                  <a:lnTo>
-                    <a:pt x="0" y="2481362"/>
+                    <a:pt x="787847" y="129601"/>
+                  </a:lnTo>
+                  <a:lnTo>
+                    <a:pt x="859470" y="266116"/>
+                  </a:lnTo>
+                  <a:lnTo>
+                    <a:pt x="931092" y="397075"/>
+                  </a:lnTo>
+                  <a:lnTo>
+                    <a:pt x="1002715" y="522704"/>
+                  </a:lnTo>
+                  <a:lnTo>
+                    <a:pt x="1074337" y="643220"/>
+                  </a:lnTo>
+                  <a:lnTo>
+                    <a:pt x="1145960" y="758831"/>
+                  </a:lnTo>
+                  <a:lnTo>
+                    <a:pt x="1217582" y="869737"/>
+                  </a:lnTo>
+                  <a:lnTo>
+                    <a:pt x="1289205" y="976128"/>
+                  </a:lnTo>
+                  <a:lnTo>
+                    <a:pt x="1360827" y="1078189"/>
+                  </a:lnTo>
+                  <a:lnTo>
+                    <a:pt x="1432450" y="1176097"/>
+                  </a:lnTo>
+                  <a:lnTo>
+                    <a:pt x="1504073" y="1270019"/>
+                  </a:lnTo>
+                  <a:lnTo>
+                    <a:pt x="1575695" y="1360119"/>
+                  </a:lnTo>
+                  <a:lnTo>
+                    <a:pt x="1647318" y="1446552"/>
+                  </a:lnTo>
+                  <a:lnTo>
+                    <a:pt x="1718940" y="1529467"/>
+                  </a:lnTo>
+                  <a:lnTo>
+                    <a:pt x="1790563" y="1609007"/>
+                  </a:lnTo>
+                  <a:lnTo>
+                    <a:pt x="1862185" y="1685310"/>
+                  </a:lnTo>
+                  <a:lnTo>
+                    <a:pt x="1933808" y="1758507"/>
+                  </a:lnTo>
+                  <a:lnTo>
+                    <a:pt x="2005430" y="1828725"/>
+                  </a:lnTo>
+                  <a:lnTo>
+                    <a:pt x="2077053" y="1896085"/>
+                  </a:lnTo>
+                  <a:lnTo>
+                    <a:pt x="2148675" y="1960704"/>
+                  </a:lnTo>
+                  <a:lnTo>
+                    <a:pt x="2220298" y="2022692"/>
+                  </a:lnTo>
+                  <a:lnTo>
+                    <a:pt x="2291920" y="2082158"/>
+                  </a:lnTo>
+                  <a:lnTo>
+                    <a:pt x="2363543" y="2139203"/>
+                  </a:lnTo>
+                  <a:lnTo>
+                    <a:pt x="2435165" y="2193927"/>
+                  </a:lnTo>
+                  <a:lnTo>
+                    <a:pt x="2506788" y="2246423"/>
+                  </a:lnTo>
+                  <a:lnTo>
+                    <a:pt x="2578410" y="2296783"/>
+                  </a:lnTo>
+                  <a:lnTo>
+                    <a:pt x="2650033" y="2345093"/>
+                  </a:lnTo>
+                  <a:lnTo>
+                    <a:pt x="2721655" y="2391437"/>
+                  </a:lnTo>
+                  <a:lnTo>
+                    <a:pt x="2793278" y="2435894"/>
+                  </a:lnTo>
+                  <a:lnTo>
+                    <a:pt x="2864901" y="2478542"/>
+                  </a:lnTo>
+                  <a:lnTo>
+                    <a:pt x="2936523" y="2519455"/>
+                  </a:lnTo>
+                  <a:lnTo>
+                    <a:pt x="3008146" y="2558702"/>
+                  </a:lnTo>
+                  <a:lnTo>
+                    <a:pt x="3079768" y="2596352"/>
+                  </a:lnTo>
+                  <a:lnTo>
+                    <a:pt x="3151391" y="2632469"/>
+                  </a:lnTo>
+                  <a:lnTo>
+                    <a:pt x="3223013" y="2655463"/>
+                  </a:lnTo>
+                  <a:lnTo>
+                    <a:pt x="3294636" y="2658601"/>
+                  </a:lnTo>
+                  <a:lnTo>
+                    <a:pt x="3366258" y="2661727"/>
+                  </a:lnTo>
+                  <a:lnTo>
+                    <a:pt x="3437881" y="2664841"/>
+                  </a:lnTo>
+                  <a:lnTo>
+                    <a:pt x="3509503" y="2667944"/>
+                  </a:lnTo>
+                  <a:lnTo>
+                    <a:pt x="3581126" y="2671034"/>
+                  </a:lnTo>
+                  <a:lnTo>
+                    <a:pt x="3652748" y="2674113"/>
+                  </a:lnTo>
+                  <a:lnTo>
+                    <a:pt x="3724371" y="2677180"/>
+                  </a:lnTo>
+                  <a:lnTo>
+                    <a:pt x="3795993" y="2680236"/>
+                  </a:lnTo>
+                  <a:lnTo>
+                    <a:pt x="3867616" y="2683280"/>
+                  </a:lnTo>
+                  <a:lnTo>
+                    <a:pt x="3939238" y="2686312"/>
+                  </a:lnTo>
+                  <a:lnTo>
+                    <a:pt x="4010861" y="2689333"/>
+                  </a:lnTo>
+                  <a:lnTo>
+                    <a:pt x="4082483" y="2692343"/>
+                  </a:lnTo>
+                  <a:lnTo>
+                    <a:pt x="4154106" y="2695341"/>
+                  </a:lnTo>
+                  <a:lnTo>
+                    <a:pt x="4225729" y="2698328"/>
+                  </a:lnTo>
+                  <a:lnTo>
+                    <a:pt x="4297351" y="2701303"/>
+                  </a:lnTo>
+                  <a:lnTo>
+                    <a:pt x="4368974" y="2704268"/>
+                  </a:lnTo>
+                  <a:lnTo>
+                    <a:pt x="4440596" y="2707221"/>
+                  </a:lnTo>
+                  <a:lnTo>
+                    <a:pt x="4512219" y="2710162"/>
+                  </a:lnTo>
+                  <a:lnTo>
+                    <a:pt x="4583841" y="2713093"/>
+                  </a:lnTo>
+                  <a:lnTo>
+                    <a:pt x="4655464" y="2716013"/>
+                  </a:lnTo>
+                  <a:lnTo>
+                    <a:pt x="4727086" y="2718921"/>
+                  </a:lnTo>
+                  <a:lnTo>
+                    <a:pt x="4798709" y="2721818"/>
+                  </a:lnTo>
+                  <a:lnTo>
+                    <a:pt x="4870331" y="2724705"/>
+                  </a:lnTo>
+                  <a:lnTo>
+                    <a:pt x="4941954" y="2727580"/>
+                  </a:lnTo>
+                  <a:lnTo>
+                    <a:pt x="5013576" y="2730445"/>
+                  </a:lnTo>
+                  <a:lnTo>
+                    <a:pt x="5085199" y="2733299"/>
+                  </a:lnTo>
+                  <a:lnTo>
+                    <a:pt x="5156821" y="2736142"/>
+                  </a:lnTo>
+                  <a:lnTo>
+                    <a:pt x="5228444" y="2738974"/>
+                  </a:lnTo>
+                  <a:lnTo>
+                    <a:pt x="5300066" y="2741796"/>
+                  </a:lnTo>
+                  <a:lnTo>
+                    <a:pt x="5371689" y="2744606"/>
+                  </a:lnTo>
+                  <a:lnTo>
+                    <a:pt x="5443311" y="2747407"/>
+                  </a:lnTo>
+                  <a:lnTo>
+                    <a:pt x="5514934" y="2750196"/>
+                  </a:lnTo>
+                  <a:lnTo>
+                    <a:pt x="5586557" y="2752975"/>
+                  </a:lnTo>
+                  <a:lnTo>
+                    <a:pt x="5658179" y="2755744"/>
+                  </a:lnTo>
+                  <a:lnTo>
+                    <a:pt x="5729802" y="2758502"/>
+                  </a:lnTo>
+                  <a:lnTo>
+                    <a:pt x="5801424" y="2761249"/>
+                  </a:lnTo>
+                  <a:lnTo>
+                    <a:pt x="5873047" y="2763986"/>
+                  </a:lnTo>
+                  <a:lnTo>
+                    <a:pt x="5944669" y="2766713"/>
+                  </a:lnTo>
+                  <a:lnTo>
+                    <a:pt x="6016292" y="2769429"/>
+                  </a:lnTo>
+                  <a:lnTo>
+                    <a:pt x="6087914" y="2772135"/>
+                  </a:lnTo>
+                  <a:lnTo>
+                    <a:pt x="6159537" y="2774831"/>
+                  </a:lnTo>
+                  <a:lnTo>
+                    <a:pt x="6231159" y="2777517"/>
+                  </a:lnTo>
+                  <a:lnTo>
+                    <a:pt x="6302782" y="2780192"/>
+                  </a:lnTo>
+                  <a:lnTo>
+                    <a:pt x="6374404" y="2782858"/>
+                  </a:lnTo>
+                  <a:lnTo>
+                    <a:pt x="6446027" y="2785513"/>
+                  </a:lnTo>
+                  <a:lnTo>
+                    <a:pt x="6517649" y="2788158"/>
+                  </a:lnTo>
+                  <a:lnTo>
+                    <a:pt x="6589272" y="2790793"/>
+                  </a:lnTo>
+                  <a:lnTo>
+                    <a:pt x="6660894" y="2793418"/>
+                  </a:lnTo>
+                  <a:lnTo>
+                    <a:pt x="6732517" y="2796034"/>
+                  </a:lnTo>
+                  <a:lnTo>
+                    <a:pt x="6804139" y="2798639"/>
+                  </a:lnTo>
+                  <a:lnTo>
+                    <a:pt x="6875762" y="2801234"/>
+                  </a:lnTo>
+                  <a:lnTo>
+                    <a:pt x="6947385" y="2803820"/>
+                  </a:lnTo>
+                  <a:lnTo>
+                    <a:pt x="7019007" y="2806396"/>
+                  </a:lnTo>
+                  <a:lnTo>
+                    <a:pt x="7090630" y="2808962"/>
+                  </a:lnTo>
+                  <a:lnTo>
+                    <a:pt x="7090630" y="3397139"/>
+                  </a:lnTo>
+                  <a:lnTo>
+                    <a:pt x="7019007" y="3393465"/>
+                  </a:lnTo>
+                  <a:lnTo>
+                    <a:pt x="6947385" y="3389634"/>
+                  </a:lnTo>
+                  <a:lnTo>
+                    <a:pt x="6875762" y="3385642"/>
+                  </a:lnTo>
+                  <a:lnTo>
+                    <a:pt x="6804139" y="3381479"/>
+                  </a:lnTo>
+                  <a:lnTo>
+                    <a:pt x="6732517" y="3377140"/>
+                  </a:lnTo>
+                  <a:lnTo>
+                    <a:pt x="6660894" y="3372617"/>
+                  </a:lnTo>
+                  <a:lnTo>
+                    <a:pt x="6589272" y="3367902"/>
+                  </a:lnTo>
+                  <a:lnTo>
+                    <a:pt x="6517649" y="3362987"/>
+                  </a:lnTo>
+                  <a:lnTo>
+                    <a:pt x="6446027" y="3357864"/>
+                  </a:lnTo>
+                  <a:lnTo>
+                    <a:pt x="6374404" y="3352523"/>
+                  </a:lnTo>
+                  <a:lnTo>
+                    <a:pt x="6302782" y="3346956"/>
+                  </a:lnTo>
+                  <a:lnTo>
+                    <a:pt x="6231159" y="3341152"/>
+                  </a:lnTo>
+                  <a:lnTo>
+                    <a:pt x="6159537" y="3335102"/>
+                  </a:lnTo>
+                  <a:lnTo>
+                    <a:pt x="6087914" y="3328795"/>
+                  </a:lnTo>
+                  <a:lnTo>
+                    <a:pt x="6016292" y="3322221"/>
+                  </a:lnTo>
+                  <a:lnTo>
+                    <a:pt x="5944669" y="3315368"/>
+                  </a:lnTo>
+                  <a:lnTo>
+                    <a:pt x="5873047" y="3308224"/>
+                  </a:lnTo>
+                  <a:lnTo>
+                    <a:pt x="5801424" y="3300778"/>
+                  </a:lnTo>
+                  <a:lnTo>
+                    <a:pt x="5729802" y="3293015"/>
+                  </a:lnTo>
+                  <a:lnTo>
+                    <a:pt x="5658179" y="3284922"/>
+                  </a:lnTo>
+                  <a:lnTo>
+                    <a:pt x="5586557" y="3276487"/>
+                  </a:lnTo>
+                  <a:lnTo>
+                    <a:pt x="5514934" y="3267693"/>
+                  </a:lnTo>
+                  <a:lnTo>
+                    <a:pt x="5443311" y="3258527"/>
+                  </a:lnTo>
+                  <a:lnTo>
+                    <a:pt x="5371689" y="3248971"/>
+                  </a:lnTo>
+                  <a:lnTo>
+                    <a:pt x="5300066" y="3239010"/>
+                  </a:lnTo>
+                  <a:lnTo>
+                    <a:pt x="5228444" y="3228627"/>
+                  </a:lnTo>
+                  <a:lnTo>
+                    <a:pt x="5156821" y="3217803"/>
+                  </a:lnTo>
+                  <a:lnTo>
+                    <a:pt x="5085199" y="3206520"/>
+                  </a:lnTo>
+                  <a:lnTo>
+                    <a:pt x="5013576" y="3194758"/>
+                  </a:lnTo>
+                  <a:lnTo>
+                    <a:pt x="4941954" y="3182497"/>
+                  </a:lnTo>
+                  <a:lnTo>
+                    <a:pt x="4870331" y="3169715"/>
+                  </a:lnTo>
+                  <a:lnTo>
+                    <a:pt x="4798709" y="3156392"/>
+                  </a:lnTo>
+                  <a:lnTo>
+                    <a:pt x="4727086" y="3142503"/>
+                  </a:lnTo>
+                  <a:lnTo>
+                    <a:pt x="4655464" y="3128025"/>
+                  </a:lnTo>
+                  <a:lnTo>
+                    <a:pt x="4583841" y="3112933"/>
+                  </a:lnTo>
+                  <a:lnTo>
+                    <a:pt x="4512219" y="3097200"/>
+                  </a:lnTo>
+                  <a:lnTo>
+                    <a:pt x="4440596" y="3080800"/>
+                  </a:lnTo>
+                  <a:lnTo>
+                    <a:pt x="4368974" y="3063704"/>
+                  </a:lnTo>
+                  <a:lnTo>
+                    <a:pt x="4297351" y="3045883"/>
+                  </a:lnTo>
+                  <a:lnTo>
+                    <a:pt x="4225729" y="3027306"/>
+                  </a:lnTo>
+                  <a:lnTo>
+                    <a:pt x="4154106" y="3007940"/>
+                  </a:lnTo>
+                  <a:lnTo>
+                    <a:pt x="4082483" y="2987753"/>
+                  </a:lnTo>
+                  <a:lnTo>
+                    <a:pt x="4010861" y="2966709"/>
+                  </a:lnTo>
+                  <a:lnTo>
+                    <a:pt x="3939238" y="2944773"/>
+                  </a:lnTo>
+                  <a:lnTo>
+                    <a:pt x="3867616" y="2921906"/>
+                  </a:lnTo>
+                  <a:lnTo>
+                    <a:pt x="3795993" y="2898068"/>
+                  </a:lnTo>
+                  <a:lnTo>
+                    <a:pt x="3724371" y="2873219"/>
+                  </a:lnTo>
+                  <a:lnTo>
+                    <a:pt x="3652748" y="2847316"/>
+                  </a:lnTo>
+                  <a:lnTo>
+                    <a:pt x="3581126" y="2820314"/>
+                  </a:lnTo>
+                  <a:lnTo>
+                    <a:pt x="3509503" y="2792167"/>
+                  </a:lnTo>
+                  <a:lnTo>
+                    <a:pt x="3437881" y="2762825"/>
+                  </a:lnTo>
+                  <a:lnTo>
+                    <a:pt x="3366258" y="2732238"/>
+                  </a:lnTo>
+                  <a:lnTo>
+                    <a:pt x="3294636" y="2700354"/>
+                  </a:lnTo>
+                  <a:lnTo>
+                    <a:pt x="3223013" y="2667116"/>
+                  </a:lnTo>
+                  <a:lnTo>
+                    <a:pt x="3151391" y="2652314"/>
+                  </a:lnTo>
+                  <a:lnTo>
+                    <a:pt x="3079768" y="2649152"/>
+                  </a:lnTo>
+                  <a:lnTo>
+                    <a:pt x="3008146" y="2645978"/>
+                  </a:lnTo>
+                  <a:lnTo>
+                    <a:pt x="2936523" y="2642792"/>
+                  </a:lnTo>
+                  <a:lnTo>
+                    <a:pt x="2864901" y="2639594"/>
+                  </a:lnTo>
+                  <a:lnTo>
+                    <a:pt x="2793278" y="2636384"/>
+                  </a:lnTo>
+                  <a:lnTo>
+                    <a:pt x="2721655" y="2633162"/>
+                  </a:lnTo>
+                  <a:lnTo>
+                    <a:pt x="2650033" y="2629927"/>
+                  </a:lnTo>
+                  <a:lnTo>
+                    <a:pt x="2578410" y="2626680"/>
+                  </a:lnTo>
+                  <a:lnTo>
+                    <a:pt x="2506788" y="2623421"/>
+                  </a:lnTo>
+                  <a:lnTo>
+                    <a:pt x="2435165" y="2620149"/>
+                  </a:lnTo>
+                  <a:lnTo>
+                    <a:pt x="2363543" y="2616865"/>
+                  </a:lnTo>
+                  <a:lnTo>
+                    <a:pt x="2291920" y="2613569"/>
+                  </a:lnTo>
+                  <a:lnTo>
+                    <a:pt x="2220298" y="2610260"/>
+                  </a:lnTo>
+                  <a:lnTo>
+                    <a:pt x="2148675" y="2606938"/>
+                  </a:lnTo>
+                  <a:lnTo>
+                    <a:pt x="2077053" y="2603604"/>
+                  </a:lnTo>
+                  <a:lnTo>
+                    <a:pt x="2005430" y="2600257"/>
+                  </a:lnTo>
+                  <a:lnTo>
+                    <a:pt x="1933808" y="2596897"/>
+                  </a:lnTo>
+                  <a:lnTo>
+                    <a:pt x="1862185" y="2593524"/>
+                  </a:lnTo>
+                  <a:lnTo>
+                    <a:pt x="1790563" y="2590139"/>
+                  </a:lnTo>
+                  <a:lnTo>
+                    <a:pt x="1718940" y="2586741"/>
+                  </a:lnTo>
+                  <a:lnTo>
+                    <a:pt x="1647318" y="2583330"/>
+                  </a:lnTo>
+                  <a:lnTo>
+                    <a:pt x="1575695" y="2579906"/>
+                  </a:lnTo>
+                  <a:lnTo>
+                    <a:pt x="1504073" y="2576468"/>
+                  </a:lnTo>
+                  <a:lnTo>
+                    <a:pt x="1432450" y="2573018"/>
+                  </a:lnTo>
+                  <a:lnTo>
+                    <a:pt x="1360827" y="2569555"/>
+                  </a:lnTo>
+                  <a:lnTo>
+                    <a:pt x="1289205" y="2566078"/>
+                  </a:lnTo>
+                  <a:lnTo>
+                    <a:pt x="1217582" y="2562589"/>
+                  </a:lnTo>
+                  <a:lnTo>
+                    <a:pt x="1145960" y="2559086"/>
+                  </a:lnTo>
+                  <a:lnTo>
+                    <a:pt x="1074337" y="2555570"/>
+                  </a:lnTo>
+                  <a:lnTo>
+                    <a:pt x="1002715" y="2552040"/>
+                  </a:lnTo>
+                  <a:lnTo>
+                    <a:pt x="931092" y="2548497"/>
+                  </a:lnTo>
+                  <a:lnTo>
+                    <a:pt x="859470" y="2544940"/>
+                  </a:lnTo>
+                  <a:lnTo>
+                    <a:pt x="787847" y="2541370"/>
+                  </a:lnTo>
+                  <a:lnTo>
+                    <a:pt x="716225" y="2537786"/>
+                  </a:lnTo>
+                  <a:lnTo>
+                    <a:pt x="644602" y="2534189"/>
+                  </a:lnTo>
+                  <a:lnTo>
+                    <a:pt x="572980" y="2530578"/>
+                  </a:lnTo>
+                  <a:lnTo>
+                    <a:pt x="501357" y="2526953"/>
+                  </a:lnTo>
+                  <a:lnTo>
+                    <a:pt x="429735" y="2523315"/>
+                  </a:lnTo>
+                  <a:lnTo>
+                    <a:pt x="358112" y="2519663"/>
+                  </a:lnTo>
+                  <a:lnTo>
+                    <a:pt x="286490" y="2515996"/>
+                  </a:lnTo>
+                  <a:lnTo>
+                    <a:pt x="214867" y="2512316"/>
+                  </a:lnTo>
+                  <a:lnTo>
+                    <a:pt x="143245" y="2508622"/>
+                  </a:lnTo>
+                  <a:lnTo>
+                    <a:pt x="71622" y="2504914"/>
+                  </a:lnTo>
+                  <a:lnTo>
+                    <a:pt x="0" y="2501192"/>
                   </a:lnTo>
                   <a:close/>
                 </a:path>
@@ -3603,282 +3603,282 @@
           </p:nvSpPr>
           <p:spPr>
             <a:xfrm>
-              <a:off x="1889842" y="2073503"/>
-              <a:ext cx="6372836" cy="2825565"/>
+              <a:off x="1894669" y="2073503"/>
+              <a:ext cx="6368009" cy="2808962"/>
             </a:xfrm>
             <a:custGeom>
               <a:avLst/>
               <a:pathLst>
-                <a:path w="6372836" h="2825565">
+                <a:path w="6368009" h="2808962">
                   <a:moveTo>
                     <a:pt x="0" y="0"/>
                   </a:moveTo>
                   <a:lnTo>
-                    <a:pt x="70054" y="138785"/>
-                  </a:lnTo>
-                  <a:lnTo>
-                    <a:pt x="141676" y="274903"/>
-                  </a:lnTo>
-                  <a:lnTo>
-                    <a:pt x="213299" y="405482"/>
-                  </a:lnTo>
-                  <a:lnTo>
-                    <a:pt x="284921" y="530747"/>
-                  </a:lnTo>
-                  <a:lnTo>
-                    <a:pt x="356544" y="650915"/>
-                  </a:lnTo>
-                  <a:lnTo>
-                    <a:pt x="428166" y="766193"/>
-                  </a:lnTo>
-                  <a:lnTo>
-                    <a:pt x="499789" y="876779"/>
-                  </a:lnTo>
-                  <a:lnTo>
-                    <a:pt x="571412" y="982866"/>
-                  </a:lnTo>
-                  <a:lnTo>
-                    <a:pt x="643034" y="1084635"/>
-                  </a:lnTo>
-                  <a:lnTo>
-                    <a:pt x="714657" y="1182264"/>
-                  </a:lnTo>
-                  <a:lnTo>
-                    <a:pt x="786279" y="1275919"/>
-                  </a:lnTo>
-                  <a:lnTo>
-                    <a:pt x="857902" y="1365763"/>
-                  </a:lnTo>
-                  <a:lnTo>
-                    <a:pt x="929524" y="1451951"/>
-                  </a:lnTo>
-                  <a:lnTo>
-                    <a:pt x="1001147" y="1534632"/>
-                  </a:lnTo>
-                  <a:lnTo>
-                    <a:pt x="1072769" y="1613948"/>
-                  </a:lnTo>
-                  <a:lnTo>
-                    <a:pt x="1144392" y="1690037"/>
-                  </a:lnTo>
-                  <a:lnTo>
-                    <a:pt x="1216014" y="1763029"/>
-                  </a:lnTo>
-                  <a:lnTo>
-                    <a:pt x="1287637" y="1833051"/>
-                  </a:lnTo>
-                  <a:lnTo>
-                    <a:pt x="1359259" y="1900224"/>
-                  </a:lnTo>
-                  <a:lnTo>
-                    <a:pt x="1430882" y="1964663"/>
-                  </a:lnTo>
-                  <a:lnTo>
-                    <a:pt x="1502504" y="2026479"/>
-                  </a:lnTo>
-                  <a:lnTo>
-                    <a:pt x="1574127" y="2085781"/>
-                  </a:lnTo>
-                  <a:lnTo>
-                    <a:pt x="1645749" y="2142669"/>
-                  </a:lnTo>
-                  <a:lnTo>
-                    <a:pt x="1717372" y="2197242"/>
-                  </a:lnTo>
-                  <a:lnTo>
-                    <a:pt x="1788994" y="2249594"/>
-                  </a:lnTo>
-                  <a:lnTo>
-                    <a:pt x="1860617" y="2299816"/>
-                  </a:lnTo>
-                  <a:lnTo>
-                    <a:pt x="1932240" y="2347994"/>
-                  </a:lnTo>
-                  <a:lnTo>
-                    <a:pt x="2003862" y="2394212"/>
-                  </a:lnTo>
-                  <a:lnTo>
-                    <a:pt x="2075485" y="2438549"/>
-                  </a:lnTo>
-                  <a:lnTo>
-                    <a:pt x="2147107" y="2481082"/>
-                  </a:lnTo>
-                  <a:lnTo>
-                    <a:pt x="2218730" y="2521884"/>
-                  </a:lnTo>
-                  <a:lnTo>
-                    <a:pt x="2290352" y="2561025"/>
-                  </a:lnTo>
-                  <a:lnTo>
-                    <a:pt x="2361975" y="2598574"/>
-                  </a:lnTo>
-                  <a:lnTo>
-                    <a:pt x="2433597" y="2634595"/>
-                  </a:lnTo>
-                  <a:lnTo>
-                    <a:pt x="2505220" y="2655816"/>
-                  </a:lnTo>
-                  <a:lnTo>
-                    <a:pt x="2576842" y="2659326"/>
-                  </a:lnTo>
-                  <a:lnTo>
-                    <a:pt x="2648465" y="2662822"/>
-                  </a:lnTo>
-                  <a:lnTo>
-                    <a:pt x="2720087" y="2666303"/>
-                  </a:lnTo>
-                  <a:lnTo>
-                    <a:pt x="2791710" y="2669769"/>
-                  </a:lnTo>
-                  <a:lnTo>
-                    <a:pt x="2863332" y="2673220"/>
-                  </a:lnTo>
-                  <a:lnTo>
-                    <a:pt x="2934955" y="2676657"/>
-                  </a:lnTo>
-                  <a:lnTo>
-                    <a:pt x="3006577" y="2680079"/>
-                  </a:lnTo>
-                  <a:lnTo>
-                    <a:pt x="3078200" y="2683486"/>
-                  </a:lnTo>
-                  <a:lnTo>
-                    <a:pt x="3149822" y="2686879"/>
-                  </a:lnTo>
-                  <a:lnTo>
-                    <a:pt x="3221445" y="2690258"/>
-                  </a:lnTo>
-                  <a:lnTo>
-                    <a:pt x="3293068" y="2693623"/>
-                  </a:lnTo>
-                  <a:lnTo>
-                    <a:pt x="3364690" y="2696973"/>
-                  </a:lnTo>
-                  <a:lnTo>
-                    <a:pt x="3436313" y="2700309"/>
-                  </a:lnTo>
-                  <a:lnTo>
-                    <a:pt x="3507935" y="2703630"/>
-                  </a:lnTo>
-                  <a:lnTo>
-                    <a:pt x="3579558" y="2706938"/>
-                  </a:lnTo>
-                  <a:lnTo>
-                    <a:pt x="3651180" y="2710232"/>
-                  </a:lnTo>
-                  <a:lnTo>
-                    <a:pt x="3722803" y="2713512"/>
-                  </a:lnTo>
-                  <a:lnTo>
-                    <a:pt x="3794425" y="2716777"/>
-                  </a:lnTo>
-                  <a:lnTo>
-                    <a:pt x="3866048" y="2720029"/>
-                  </a:lnTo>
-                  <a:lnTo>
-                    <a:pt x="3937670" y="2723268"/>
-                  </a:lnTo>
-                  <a:lnTo>
-                    <a:pt x="4009293" y="2726492"/>
-                  </a:lnTo>
-                  <a:lnTo>
-                    <a:pt x="4080915" y="2729703"/>
-                  </a:lnTo>
-                  <a:lnTo>
-                    <a:pt x="4152538" y="2732900"/>
-                  </a:lnTo>
-                  <a:lnTo>
-                    <a:pt x="4224160" y="2736084"/>
-                  </a:lnTo>
-                  <a:lnTo>
-                    <a:pt x="4295783" y="2739254"/>
-                  </a:lnTo>
-                  <a:lnTo>
-                    <a:pt x="4367405" y="2742411"/>
-                  </a:lnTo>
-                  <a:lnTo>
-                    <a:pt x="4439028" y="2745554"/>
-                  </a:lnTo>
-                  <a:lnTo>
-                    <a:pt x="4510650" y="2748684"/>
-                  </a:lnTo>
-                  <a:lnTo>
-                    <a:pt x="4582273" y="2751800"/>
-                  </a:lnTo>
-                  <a:lnTo>
-                    <a:pt x="4653896" y="2754904"/>
-                  </a:lnTo>
-                  <a:lnTo>
-                    <a:pt x="4725518" y="2757994"/>
-                  </a:lnTo>
-                  <a:lnTo>
-                    <a:pt x="4797141" y="2761072"/>
-                  </a:lnTo>
-                  <a:lnTo>
-                    <a:pt x="4868763" y="2764136"/>
-                  </a:lnTo>
-                  <a:lnTo>
-                    <a:pt x="4940386" y="2767187"/>
-                  </a:lnTo>
-                  <a:lnTo>
-                    <a:pt x="5012008" y="2770225"/>
-                  </a:lnTo>
-                  <a:lnTo>
-                    <a:pt x="5083631" y="2773250"/>
-                  </a:lnTo>
-                  <a:lnTo>
-                    <a:pt x="5155253" y="2776263"/>
-                  </a:lnTo>
-                  <a:lnTo>
-                    <a:pt x="5226876" y="2779263"/>
-                  </a:lnTo>
-                  <a:lnTo>
-                    <a:pt x="5298498" y="2782250"/>
-                  </a:lnTo>
-                  <a:lnTo>
-                    <a:pt x="5370121" y="2785224"/>
-                  </a:lnTo>
-                  <a:lnTo>
-                    <a:pt x="5441743" y="2788186"/>
-                  </a:lnTo>
-                  <a:lnTo>
-                    <a:pt x="5513366" y="2791135"/>
-                  </a:lnTo>
-                  <a:lnTo>
-                    <a:pt x="5584988" y="2794072"/>
-                  </a:lnTo>
-                  <a:lnTo>
-                    <a:pt x="5656611" y="2796996"/>
-                  </a:lnTo>
-                  <a:lnTo>
-                    <a:pt x="5728233" y="2799908"/>
-                  </a:lnTo>
-                  <a:lnTo>
-                    <a:pt x="5799856" y="2802807"/>
-                  </a:lnTo>
-                  <a:lnTo>
-                    <a:pt x="5871478" y="2805695"/>
-                  </a:lnTo>
-                  <a:lnTo>
-                    <a:pt x="5943101" y="2808570"/>
-                  </a:lnTo>
-                  <a:lnTo>
-                    <a:pt x="6014724" y="2811432"/>
-                  </a:lnTo>
-                  <a:lnTo>
-                    <a:pt x="6086346" y="2814283"/>
-                  </a:lnTo>
-                  <a:lnTo>
-                    <a:pt x="6157969" y="2817122"/>
-                  </a:lnTo>
-                  <a:lnTo>
-                    <a:pt x="6229591" y="2819948"/>
-                  </a:lnTo>
-                  <a:lnTo>
-                    <a:pt x="6301214" y="2822763"/>
-                  </a:lnTo>
-                  <a:lnTo>
-                    <a:pt x="6372836" y="2825565"/>
+                    <a:pt x="65227" y="129601"/>
+                  </a:lnTo>
+                  <a:lnTo>
+                    <a:pt x="136850" y="266116"/>
+                  </a:lnTo>
+                  <a:lnTo>
+                    <a:pt x="208472" y="397075"/>
+                  </a:lnTo>
+                  <a:lnTo>
+                    <a:pt x="280095" y="522704"/>
+                  </a:lnTo>
+                  <a:lnTo>
+                    <a:pt x="351717" y="643220"/>
+                  </a:lnTo>
+                  <a:lnTo>
+                    <a:pt x="423340" y="758831"/>
+                  </a:lnTo>
+                  <a:lnTo>
+                    <a:pt x="494962" y="869737"/>
+                  </a:lnTo>
+                  <a:lnTo>
+                    <a:pt x="566585" y="976128"/>
+                  </a:lnTo>
+                  <a:lnTo>
+                    <a:pt x="638207" y="1078189"/>
+                  </a:lnTo>
+                  <a:lnTo>
+                    <a:pt x="709830" y="1176097"/>
+                  </a:lnTo>
+                  <a:lnTo>
+                    <a:pt x="781452" y="1270019"/>
+                  </a:lnTo>
+                  <a:lnTo>
+                    <a:pt x="853075" y="1360119"/>
+                  </a:lnTo>
+                  <a:lnTo>
+                    <a:pt x="924697" y="1446552"/>
+                  </a:lnTo>
+                  <a:lnTo>
+                    <a:pt x="996320" y="1529467"/>
+                  </a:lnTo>
+                  <a:lnTo>
+                    <a:pt x="1067943" y="1609007"/>
+                  </a:lnTo>
+                  <a:lnTo>
+                    <a:pt x="1139565" y="1685310"/>
+                  </a:lnTo>
+                  <a:lnTo>
+                    <a:pt x="1211188" y="1758507"/>
+                  </a:lnTo>
+                  <a:lnTo>
+                    <a:pt x="1282810" y="1828725"/>
+                  </a:lnTo>
+                  <a:lnTo>
+                    <a:pt x="1354433" y="1896085"/>
+                  </a:lnTo>
+                  <a:lnTo>
+                    <a:pt x="1426055" y="1960704"/>
+                  </a:lnTo>
+                  <a:lnTo>
+                    <a:pt x="1497678" y="2022692"/>
+                  </a:lnTo>
+                  <a:lnTo>
+                    <a:pt x="1569300" y="2082158"/>
+                  </a:lnTo>
+                  <a:lnTo>
+                    <a:pt x="1640923" y="2139203"/>
+                  </a:lnTo>
+                  <a:lnTo>
+                    <a:pt x="1712545" y="2193927"/>
+                  </a:lnTo>
+                  <a:lnTo>
+                    <a:pt x="1784168" y="2246423"/>
+                  </a:lnTo>
+                  <a:lnTo>
+                    <a:pt x="1855790" y="2296783"/>
+                  </a:lnTo>
+                  <a:lnTo>
+                    <a:pt x="1927413" y="2345093"/>
+                  </a:lnTo>
+                  <a:lnTo>
+                    <a:pt x="1999035" y="2391437"/>
+                  </a:lnTo>
+                  <a:lnTo>
+                    <a:pt x="2070658" y="2435894"/>
+                  </a:lnTo>
+                  <a:lnTo>
+                    <a:pt x="2142280" y="2478542"/>
+                  </a:lnTo>
+                  <a:lnTo>
+                    <a:pt x="2213903" y="2519455"/>
+                  </a:lnTo>
+                  <a:lnTo>
+                    <a:pt x="2285525" y="2558702"/>
+                  </a:lnTo>
+                  <a:lnTo>
+                    <a:pt x="2357148" y="2596352"/>
+                  </a:lnTo>
+                  <a:lnTo>
+                    <a:pt x="2428771" y="2632469"/>
+                  </a:lnTo>
+                  <a:lnTo>
+                    <a:pt x="2500393" y="2655463"/>
+                  </a:lnTo>
+                  <a:lnTo>
+                    <a:pt x="2572016" y="2658601"/>
+                  </a:lnTo>
+                  <a:lnTo>
+                    <a:pt x="2643638" y="2661727"/>
+                  </a:lnTo>
+                  <a:lnTo>
+                    <a:pt x="2715261" y="2664841"/>
+                  </a:lnTo>
+                  <a:lnTo>
+                    <a:pt x="2786883" y="2667944"/>
+                  </a:lnTo>
+                  <a:lnTo>
+                    <a:pt x="2858506" y="2671034"/>
+                  </a:lnTo>
+                  <a:lnTo>
+                    <a:pt x="2930128" y="2674113"/>
+                  </a:lnTo>
+                  <a:lnTo>
+                    <a:pt x="3001751" y="2677180"/>
+                  </a:lnTo>
+                  <a:lnTo>
+                    <a:pt x="3073373" y="2680236"/>
+                  </a:lnTo>
+                  <a:lnTo>
+                    <a:pt x="3144996" y="2683280"/>
+                  </a:lnTo>
+                  <a:lnTo>
+                    <a:pt x="3216618" y="2686312"/>
+                  </a:lnTo>
+                  <a:lnTo>
+                    <a:pt x="3288241" y="2689333"/>
+                  </a:lnTo>
+                  <a:lnTo>
+                    <a:pt x="3359863" y="2692343"/>
+                  </a:lnTo>
+                  <a:lnTo>
+                    <a:pt x="3431486" y="2695341"/>
+                  </a:lnTo>
+                  <a:lnTo>
+                    <a:pt x="3503108" y="2698328"/>
+                  </a:lnTo>
+                  <a:lnTo>
+                    <a:pt x="3574731" y="2701303"/>
+                  </a:lnTo>
+                  <a:lnTo>
+                    <a:pt x="3646353" y="2704268"/>
+                  </a:lnTo>
+                  <a:lnTo>
+                    <a:pt x="3717976" y="2707221"/>
+                  </a:lnTo>
+                  <a:lnTo>
+                    <a:pt x="3789599" y="2710162"/>
+                  </a:lnTo>
+                  <a:lnTo>
+                    <a:pt x="3861221" y="2713093"/>
+                  </a:lnTo>
+                  <a:lnTo>
+                    <a:pt x="3932844" y="2716013"/>
+                  </a:lnTo>
+                  <a:lnTo>
+                    <a:pt x="4004466" y="2718921"/>
+                  </a:lnTo>
+                  <a:lnTo>
+                    <a:pt x="4076089" y="2721818"/>
+                  </a:lnTo>
+                  <a:lnTo>
+                    <a:pt x="4147711" y="2724705"/>
+                  </a:lnTo>
+                  <a:lnTo>
+                    <a:pt x="4219334" y="2727580"/>
+                  </a:lnTo>
+                  <a:lnTo>
+                    <a:pt x="4290956" y="2730445"/>
+                  </a:lnTo>
+                  <a:lnTo>
+                    <a:pt x="4362579" y="2733299"/>
+                  </a:lnTo>
+                  <a:lnTo>
+                    <a:pt x="4434201" y="2736142"/>
+                  </a:lnTo>
+                  <a:lnTo>
+                    <a:pt x="4505824" y="2738974"/>
+                  </a:lnTo>
+                  <a:lnTo>
+                    <a:pt x="4577446" y="2741796"/>
+                  </a:lnTo>
+                  <a:lnTo>
+                    <a:pt x="4649069" y="2744606"/>
+                  </a:lnTo>
+                  <a:lnTo>
+                    <a:pt x="4720691" y="2747407"/>
+                  </a:lnTo>
+                  <a:lnTo>
+                    <a:pt x="4792314" y="2750196"/>
+                  </a:lnTo>
+                  <a:lnTo>
+                    <a:pt x="4863936" y="2752975"/>
+                  </a:lnTo>
+                  <a:lnTo>
+                    <a:pt x="4935559" y="2755744"/>
+                  </a:lnTo>
+                  <a:lnTo>
+                    <a:pt x="5007181" y="2758502"/>
+                  </a:lnTo>
+                  <a:lnTo>
+                    <a:pt x="5078804" y="2761249"/>
+                  </a:lnTo>
+                  <a:lnTo>
+                    <a:pt x="5150427" y="2763986"/>
+                  </a:lnTo>
+                  <a:lnTo>
+                    <a:pt x="5222049" y="2766713"/>
+                  </a:lnTo>
+                  <a:lnTo>
+                    <a:pt x="5293672" y="2769429"/>
+                  </a:lnTo>
+                  <a:lnTo>
+                    <a:pt x="5365294" y="2772135"/>
+                  </a:lnTo>
+                  <a:lnTo>
+                    <a:pt x="5436917" y="2774831"/>
+                  </a:lnTo>
+                  <a:lnTo>
+                    <a:pt x="5508539" y="2777517"/>
+                  </a:lnTo>
+                  <a:lnTo>
+                    <a:pt x="5580162" y="2780192"/>
+                  </a:lnTo>
+                  <a:lnTo>
+                    <a:pt x="5651784" y="2782858"/>
+                  </a:lnTo>
+                  <a:lnTo>
+                    <a:pt x="5723407" y="2785513"/>
+                  </a:lnTo>
+                  <a:lnTo>
+                    <a:pt x="5795029" y="2788158"/>
+                  </a:lnTo>
+                  <a:lnTo>
+                    <a:pt x="5866652" y="2790793"/>
+                  </a:lnTo>
+                  <a:lnTo>
+                    <a:pt x="5938274" y="2793418"/>
+                  </a:lnTo>
+                  <a:lnTo>
+                    <a:pt x="6009897" y="2796034"/>
+                  </a:lnTo>
+                  <a:lnTo>
+                    <a:pt x="6081519" y="2798639"/>
+                  </a:lnTo>
+                  <a:lnTo>
+                    <a:pt x="6153142" y="2801234"/>
+                  </a:lnTo>
+                  <a:lnTo>
+                    <a:pt x="6224764" y="2803820"/>
+                  </a:lnTo>
+                  <a:lnTo>
+                    <a:pt x="6296387" y="2806396"/>
+                  </a:lnTo>
+                  <a:lnTo>
+                    <a:pt x="6368009" y="2808962"/>
                   </a:lnTo>
                 </a:path>
               </a:pathLst>
@@ -3898,309 +3898,309 @@
           </p:nvSpPr>
           <p:spPr>
             <a:xfrm>
-              <a:off x="1172049" y="4554865"/>
-              <a:ext cx="7090630" cy="915959"/>
+              <a:off x="1172049" y="4574695"/>
+              <a:ext cx="7090630" cy="895947"/>
             </a:xfrm>
             <a:custGeom>
               <a:avLst/>
               <a:pathLst>
-                <a:path w="7090630" h="915959">
+                <a:path w="7090630" h="895947">
                   <a:moveTo>
-                    <a:pt x="7090630" y="915959"/>
+                    <a:pt x="7090630" y="895947"/>
                   </a:moveTo>
                   <a:lnTo>
-                    <a:pt x="7019007" y="912292"/>
-                  </a:lnTo>
-                  <a:lnTo>
-                    <a:pt x="6947385" y="908471"/>
-                  </a:lnTo>
-                  <a:lnTo>
-                    <a:pt x="6875762" y="904487"/>
-                  </a:lnTo>
-                  <a:lnTo>
-                    <a:pt x="6804139" y="900334"/>
-                  </a:lnTo>
-                  <a:lnTo>
-                    <a:pt x="6732517" y="896005"/>
-                  </a:lnTo>
-                  <a:lnTo>
-                    <a:pt x="6660894" y="891493"/>
-                  </a:lnTo>
-                  <a:lnTo>
-                    <a:pt x="6589272" y="886789"/>
-                  </a:lnTo>
-                  <a:lnTo>
-                    <a:pt x="6517649" y="881885"/>
-                  </a:lnTo>
-                  <a:lnTo>
-                    <a:pt x="6446027" y="876774"/>
-                  </a:lnTo>
-                  <a:lnTo>
-                    <a:pt x="6374404" y="871445"/>
-                  </a:lnTo>
-                  <a:lnTo>
-                    <a:pt x="6302782" y="865891"/>
-                  </a:lnTo>
-                  <a:lnTo>
-                    <a:pt x="6231159" y="860101"/>
-                  </a:lnTo>
-                  <a:lnTo>
-                    <a:pt x="6159537" y="854065"/>
-                  </a:lnTo>
-                  <a:lnTo>
-                    <a:pt x="6087914" y="847774"/>
-                  </a:lnTo>
-                  <a:lnTo>
-                    <a:pt x="6016292" y="841215"/>
-                  </a:lnTo>
-                  <a:lnTo>
-                    <a:pt x="5944669" y="834378"/>
-                  </a:lnTo>
-                  <a:lnTo>
-                    <a:pt x="5873047" y="827252"/>
-                  </a:lnTo>
-                  <a:lnTo>
-                    <a:pt x="5801424" y="819823"/>
-                  </a:lnTo>
-                  <a:lnTo>
-                    <a:pt x="5729802" y="812078"/>
-                  </a:lnTo>
-                  <a:lnTo>
-                    <a:pt x="5658179" y="804006"/>
-                  </a:lnTo>
-                  <a:lnTo>
-                    <a:pt x="5586557" y="795591"/>
-                  </a:lnTo>
-                  <a:lnTo>
-                    <a:pt x="5514934" y="786819"/>
-                  </a:lnTo>
-                  <a:lnTo>
-                    <a:pt x="5443311" y="777674"/>
-                  </a:lnTo>
-                  <a:lnTo>
-                    <a:pt x="5371689" y="768142"/>
-                  </a:lnTo>
-                  <a:lnTo>
-                    <a:pt x="5300066" y="758206"/>
-                  </a:lnTo>
-                  <a:lnTo>
-                    <a:pt x="5228444" y="747848"/>
-                  </a:lnTo>
-                  <a:lnTo>
-                    <a:pt x="5156821" y="737050"/>
-                  </a:lnTo>
-                  <a:lnTo>
-                    <a:pt x="5085199" y="725795"/>
-                  </a:lnTo>
-                  <a:lnTo>
-                    <a:pt x="5013576" y="714062"/>
-                  </a:lnTo>
-                  <a:lnTo>
-                    <a:pt x="4941954" y="701832"/>
-                  </a:lnTo>
-                  <a:lnTo>
-                    <a:pt x="4870331" y="689082"/>
-                  </a:lnTo>
-                  <a:lnTo>
-                    <a:pt x="4798709" y="675792"/>
-                  </a:lnTo>
-                  <a:lnTo>
-                    <a:pt x="4727086" y="661938"/>
-                  </a:lnTo>
-                  <a:lnTo>
-                    <a:pt x="4655464" y="647497"/>
-                  </a:lnTo>
-                  <a:lnTo>
-                    <a:pt x="4583841" y="632442"/>
-                  </a:lnTo>
-                  <a:lnTo>
-                    <a:pt x="4512219" y="616750"/>
-                  </a:lnTo>
-                  <a:lnTo>
-                    <a:pt x="4440596" y="600391"/>
-                  </a:lnTo>
-                  <a:lnTo>
-                    <a:pt x="4368974" y="583339"/>
-                  </a:lnTo>
-                  <a:lnTo>
-                    <a:pt x="4297351" y="565563"/>
-                  </a:lnTo>
-                  <a:lnTo>
-                    <a:pt x="4225729" y="547033"/>
-                  </a:lnTo>
-                  <a:lnTo>
-                    <a:pt x="4154106" y="527717"/>
-                  </a:lnTo>
-                  <a:lnTo>
-                    <a:pt x="4082483" y="507582"/>
-                  </a:lnTo>
-                  <a:lnTo>
-                    <a:pt x="4010861" y="486593"/>
-                  </a:lnTo>
-                  <a:lnTo>
-                    <a:pt x="3939238" y="464713"/>
-                  </a:lnTo>
-                  <a:lnTo>
-                    <a:pt x="3867616" y="441905"/>
-                  </a:lnTo>
-                  <a:lnTo>
-                    <a:pt x="3795993" y="418130"/>
-                  </a:lnTo>
-                  <a:lnTo>
-                    <a:pt x="3724371" y="393346"/>
-                  </a:lnTo>
-                  <a:lnTo>
-                    <a:pt x="3652748" y="367511"/>
-                  </a:lnTo>
-                  <a:lnTo>
-                    <a:pt x="3581126" y="340580"/>
-                  </a:lnTo>
-                  <a:lnTo>
-                    <a:pt x="3509503" y="312506"/>
-                  </a:lnTo>
-                  <a:lnTo>
-                    <a:pt x="3437881" y="283242"/>
-                  </a:lnTo>
-                  <a:lnTo>
-                    <a:pt x="3366258" y="252736"/>
-                  </a:lnTo>
-                  <a:lnTo>
-                    <a:pt x="3294636" y="220936"/>
-                  </a:lnTo>
-                  <a:lnTo>
-                    <a:pt x="3223013" y="187787"/>
-                  </a:lnTo>
-                  <a:lnTo>
-                    <a:pt x="3151391" y="170928"/>
-                  </a:lnTo>
-                  <a:lnTo>
-                    <a:pt x="3079768" y="167388"/>
-                  </a:lnTo>
-                  <a:lnTo>
-                    <a:pt x="3008146" y="163832"/>
-                  </a:lnTo>
-                  <a:lnTo>
-                    <a:pt x="2936523" y="160262"/>
-                  </a:lnTo>
-                  <a:lnTo>
-                    <a:pt x="2864901" y="156676"/>
-                  </a:lnTo>
-                  <a:lnTo>
-                    <a:pt x="2793278" y="153075"/>
-                  </a:lnTo>
-                  <a:lnTo>
-                    <a:pt x="2721655" y="149458"/>
-                  </a:lnTo>
-                  <a:lnTo>
-                    <a:pt x="2650033" y="145826"/>
-                  </a:lnTo>
-                  <a:lnTo>
-                    <a:pt x="2578410" y="142179"/>
-                  </a:lnTo>
-                  <a:lnTo>
-                    <a:pt x="2506788" y="138516"/>
-                  </a:lnTo>
-                  <a:lnTo>
-                    <a:pt x="2435165" y="134838"/>
-                  </a:lnTo>
-                  <a:lnTo>
-                    <a:pt x="2363543" y="131144"/>
-                  </a:lnTo>
-                  <a:lnTo>
-                    <a:pt x="2291920" y="127434"/>
-                  </a:lnTo>
-                  <a:lnTo>
-                    <a:pt x="2220298" y="123708"/>
-                  </a:lnTo>
-                  <a:lnTo>
-                    <a:pt x="2148675" y="119967"/>
-                  </a:lnTo>
-                  <a:lnTo>
-                    <a:pt x="2077053" y="116209"/>
-                  </a:lnTo>
-                  <a:lnTo>
-                    <a:pt x="2005430" y="112436"/>
-                  </a:lnTo>
-                  <a:lnTo>
-                    <a:pt x="1933808" y="108646"/>
-                  </a:lnTo>
-                  <a:lnTo>
-                    <a:pt x="1862185" y="104841"/>
-                  </a:lnTo>
-                  <a:lnTo>
-                    <a:pt x="1790563" y="101019"/>
-                  </a:lnTo>
-                  <a:lnTo>
-                    <a:pt x="1718940" y="97181"/>
-                  </a:lnTo>
-                  <a:lnTo>
-                    <a:pt x="1647318" y="93326"/>
-                  </a:lnTo>
-                  <a:lnTo>
-                    <a:pt x="1575695" y="89455"/>
-                  </a:lnTo>
-                  <a:lnTo>
-                    <a:pt x="1504073" y="85568"/>
-                  </a:lnTo>
-                  <a:lnTo>
-                    <a:pt x="1432450" y="81664"/>
-                  </a:lnTo>
-                  <a:lnTo>
-                    <a:pt x="1360827" y="77744"/>
-                  </a:lnTo>
-                  <a:lnTo>
-                    <a:pt x="1289205" y="73807"/>
-                  </a:lnTo>
-                  <a:lnTo>
-                    <a:pt x="1217582" y="69853"/>
-                  </a:lnTo>
-                  <a:lnTo>
-                    <a:pt x="1145960" y="65882"/>
-                  </a:lnTo>
-                  <a:lnTo>
-                    <a:pt x="1074337" y="61894"/>
-                  </a:lnTo>
-                  <a:lnTo>
-                    <a:pt x="1002715" y="57889"/>
-                  </a:lnTo>
-                  <a:lnTo>
-                    <a:pt x="931092" y="53868"/>
-                  </a:lnTo>
-                  <a:lnTo>
-                    <a:pt x="859470" y="49829"/>
-                  </a:lnTo>
-                  <a:lnTo>
-                    <a:pt x="787847" y="45773"/>
-                  </a:lnTo>
-                  <a:lnTo>
-                    <a:pt x="716225" y="41699"/>
-                  </a:lnTo>
-                  <a:lnTo>
-                    <a:pt x="644602" y="37609"/>
-                  </a:lnTo>
-                  <a:lnTo>
-                    <a:pt x="572980" y="33500"/>
-                  </a:lnTo>
-                  <a:lnTo>
-                    <a:pt x="501357" y="29375"/>
-                  </a:lnTo>
-                  <a:lnTo>
-                    <a:pt x="429735" y="25232"/>
-                  </a:lnTo>
-                  <a:lnTo>
-                    <a:pt x="358112" y="21071"/>
-                  </a:lnTo>
-                  <a:lnTo>
-                    <a:pt x="286490" y="16892"/>
-                  </a:lnTo>
-                  <a:lnTo>
-                    <a:pt x="214867" y="12696"/>
-                  </a:lnTo>
-                  <a:lnTo>
-                    <a:pt x="143245" y="8482"/>
-                  </a:lnTo>
-                  <a:lnTo>
-                    <a:pt x="71622" y="4250"/>
+                    <a:pt x="7019007" y="892273"/>
+                  </a:lnTo>
+                  <a:lnTo>
+                    <a:pt x="6947385" y="888442"/>
+                  </a:lnTo>
+                  <a:lnTo>
+                    <a:pt x="6875762" y="884449"/>
+                  </a:lnTo>
+                  <a:lnTo>
+                    <a:pt x="6804139" y="880287"/>
+                  </a:lnTo>
+                  <a:lnTo>
+                    <a:pt x="6732517" y="875948"/>
+                  </a:lnTo>
+                  <a:lnTo>
+                    <a:pt x="6660894" y="871425"/>
+                  </a:lnTo>
+                  <a:lnTo>
+                    <a:pt x="6589272" y="866710"/>
+                  </a:lnTo>
+                  <a:lnTo>
+                    <a:pt x="6517649" y="861795"/>
+                  </a:lnTo>
+                  <a:lnTo>
+                    <a:pt x="6446027" y="856672"/>
+                  </a:lnTo>
+                  <a:lnTo>
+                    <a:pt x="6374404" y="851331"/>
+                  </a:lnTo>
+                  <a:lnTo>
+                    <a:pt x="6302782" y="845763"/>
+                  </a:lnTo>
+                  <a:lnTo>
+                    <a:pt x="6231159" y="839960"/>
+                  </a:lnTo>
+                  <a:lnTo>
+                    <a:pt x="6159537" y="833910"/>
+                  </a:lnTo>
+                  <a:lnTo>
+                    <a:pt x="6087914" y="827603"/>
+                  </a:lnTo>
+                  <a:lnTo>
+                    <a:pt x="6016292" y="821029"/>
+                  </a:lnTo>
+                  <a:lnTo>
+                    <a:pt x="5944669" y="814176"/>
+                  </a:lnTo>
+                  <a:lnTo>
+                    <a:pt x="5873047" y="807032"/>
+                  </a:lnTo>
+                  <a:lnTo>
+                    <a:pt x="5801424" y="799585"/>
+                  </a:lnTo>
+                  <a:lnTo>
+                    <a:pt x="5729802" y="791822"/>
+                  </a:lnTo>
+                  <a:lnTo>
+                    <a:pt x="5658179" y="783730"/>
+                  </a:lnTo>
+                  <a:lnTo>
+                    <a:pt x="5586557" y="775295"/>
+                  </a:lnTo>
+                  <a:lnTo>
+                    <a:pt x="5514934" y="766501"/>
+                  </a:lnTo>
+                  <a:lnTo>
+                    <a:pt x="5443311" y="757335"/>
+                  </a:lnTo>
+                  <a:lnTo>
+                    <a:pt x="5371689" y="747779"/>
+                  </a:lnTo>
+                  <a:lnTo>
+                    <a:pt x="5300066" y="737818"/>
+                  </a:lnTo>
+                  <a:lnTo>
+                    <a:pt x="5228444" y="727435"/>
+                  </a:lnTo>
+                  <a:lnTo>
+                    <a:pt x="5156821" y="716611"/>
+                  </a:lnTo>
+                  <a:lnTo>
+                    <a:pt x="5085199" y="705328"/>
+                  </a:lnTo>
+                  <a:lnTo>
+                    <a:pt x="5013576" y="693566"/>
+                  </a:lnTo>
+                  <a:lnTo>
+                    <a:pt x="4941954" y="681305"/>
+                  </a:lnTo>
+                  <a:lnTo>
+                    <a:pt x="4870331" y="668523"/>
+                  </a:lnTo>
+                  <a:lnTo>
+                    <a:pt x="4798709" y="655200"/>
+                  </a:lnTo>
+                  <a:lnTo>
+                    <a:pt x="4727086" y="641311"/>
+                  </a:lnTo>
+                  <a:lnTo>
+                    <a:pt x="4655464" y="626833"/>
+                  </a:lnTo>
+                  <a:lnTo>
+                    <a:pt x="4583841" y="611741"/>
+                  </a:lnTo>
+                  <a:lnTo>
+                    <a:pt x="4512219" y="596008"/>
+                  </a:lnTo>
+                  <a:lnTo>
+                    <a:pt x="4440596" y="579608"/>
+                  </a:lnTo>
+                  <a:lnTo>
+                    <a:pt x="4368974" y="562512"/>
+                  </a:lnTo>
+                  <a:lnTo>
+                    <a:pt x="4297351" y="544691"/>
+                  </a:lnTo>
+                  <a:lnTo>
+                    <a:pt x="4225729" y="526113"/>
+                  </a:lnTo>
+                  <a:lnTo>
+                    <a:pt x="4154106" y="506748"/>
+                  </a:lnTo>
+                  <a:lnTo>
+                    <a:pt x="4082483" y="486561"/>
+                  </a:lnTo>
+                  <a:lnTo>
+                    <a:pt x="4010861" y="465517"/>
+                  </a:lnTo>
+                  <a:lnTo>
+                    <a:pt x="3939238" y="443581"/>
+                  </a:lnTo>
+                  <a:lnTo>
+                    <a:pt x="3867616" y="420713"/>
+                  </a:lnTo>
+                  <a:lnTo>
+                    <a:pt x="3795993" y="396876"/>
+                  </a:lnTo>
+                  <a:lnTo>
+                    <a:pt x="3724371" y="372027"/>
+                  </a:lnTo>
+                  <a:lnTo>
+                    <a:pt x="3652748" y="346124"/>
+                  </a:lnTo>
+                  <a:lnTo>
+                    <a:pt x="3581126" y="319122"/>
+                  </a:lnTo>
+                  <a:lnTo>
+                    <a:pt x="3509503" y="290975"/>
+                  </a:lnTo>
+                  <a:lnTo>
+                    <a:pt x="3437881" y="261633"/>
+                  </a:lnTo>
+                  <a:lnTo>
+                    <a:pt x="3366258" y="231046"/>
+                  </a:lnTo>
+                  <a:lnTo>
+                    <a:pt x="3294636" y="199161"/>
+                  </a:lnTo>
+                  <a:lnTo>
+                    <a:pt x="3223013" y="165924"/>
+                  </a:lnTo>
+                  <a:lnTo>
+                    <a:pt x="3151391" y="151122"/>
+                  </a:lnTo>
+                  <a:lnTo>
+                    <a:pt x="3079768" y="147960"/>
+                  </a:lnTo>
+                  <a:lnTo>
+                    <a:pt x="3008146" y="144786"/>
+                  </a:lnTo>
+                  <a:lnTo>
+                    <a:pt x="2936523" y="141600"/>
+                  </a:lnTo>
+                  <a:lnTo>
+                    <a:pt x="2864901" y="138402"/>
+                  </a:lnTo>
+                  <a:lnTo>
+                    <a:pt x="2793278" y="135192"/>
+                  </a:lnTo>
+                  <a:lnTo>
+                    <a:pt x="2721655" y="131970"/>
+                  </a:lnTo>
+                  <a:lnTo>
+                    <a:pt x="2650033" y="128735"/>
+                  </a:lnTo>
+                  <a:lnTo>
+                    <a:pt x="2578410" y="125488"/>
+                  </a:lnTo>
+                  <a:lnTo>
+                    <a:pt x="2506788" y="122229"/>
+                  </a:lnTo>
+                  <a:lnTo>
+                    <a:pt x="2435165" y="118957"/>
+                  </a:lnTo>
+                  <a:lnTo>
+                    <a:pt x="2363543" y="115673"/>
+                  </a:lnTo>
+                  <a:lnTo>
+                    <a:pt x="2291920" y="112377"/>
+                  </a:lnTo>
+                  <a:lnTo>
+                    <a:pt x="2220298" y="109067"/>
+                  </a:lnTo>
+                  <a:lnTo>
+                    <a:pt x="2148675" y="105746"/>
+                  </a:lnTo>
+                  <a:lnTo>
+                    <a:pt x="2077053" y="102411"/>
+                  </a:lnTo>
+                  <a:lnTo>
+                    <a:pt x="2005430" y="99064"/>
+                  </a:lnTo>
+                  <a:lnTo>
+                    <a:pt x="1933808" y="95705"/>
+                  </a:lnTo>
+                  <a:lnTo>
+                    <a:pt x="1862185" y="92332"/>
+                  </a:lnTo>
+                  <a:lnTo>
+                    <a:pt x="1790563" y="88947"/>
+                  </a:lnTo>
+                  <a:lnTo>
+                    <a:pt x="1718940" y="85549"/>
+                  </a:lnTo>
+                  <a:lnTo>
+                    <a:pt x="1647318" y="82138"/>
+                  </a:lnTo>
+                  <a:lnTo>
+                    <a:pt x="1575695" y="78713"/>
+                  </a:lnTo>
+                  <a:lnTo>
+                    <a:pt x="1504073" y="75276"/>
+                  </a:lnTo>
+                  <a:lnTo>
+                    <a:pt x="1432450" y="71826"/>
+                  </a:lnTo>
+                  <a:lnTo>
+                    <a:pt x="1360827" y="68363"/>
+                  </a:lnTo>
+                  <a:lnTo>
+                    <a:pt x="1289205" y="64886"/>
+                  </a:lnTo>
+                  <a:lnTo>
+                    <a:pt x="1217582" y="61397"/>
+                  </a:lnTo>
+                  <a:lnTo>
+                    <a:pt x="1145960" y="57894"/>
+                  </a:lnTo>
+                  <a:lnTo>
+                    <a:pt x="1074337" y="54377"/>
+                  </a:lnTo>
+                  <a:lnTo>
+                    <a:pt x="1002715" y="50848"/>
+                  </a:lnTo>
+                  <a:lnTo>
+                    <a:pt x="931092" y="47305"/>
+                  </a:lnTo>
+                  <a:lnTo>
+                    <a:pt x="859470" y="43748"/>
+                  </a:lnTo>
+                  <a:lnTo>
+                    <a:pt x="787847" y="40178"/>
+                  </a:lnTo>
+                  <a:lnTo>
+                    <a:pt x="716225" y="36594"/>
+                  </a:lnTo>
+                  <a:lnTo>
+                    <a:pt x="644602" y="32997"/>
+                  </a:lnTo>
+                  <a:lnTo>
+                    <a:pt x="572980" y="29386"/>
+                  </a:lnTo>
+                  <a:lnTo>
+                    <a:pt x="501357" y="25761"/>
+                  </a:lnTo>
+                  <a:lnTo>
+                    <a:pt x="429735" y="22123"/>
+                  </a:lnTo>
+                  <a:lnTo>
+                    <a:pt x="358112" y="18471"/>
+                  </a:lnTo>
+                  <a:lnTo>
+                    <a:pt x="286490" y="14804"/>
+                  </a:lnTo>
+                  <a:lnTo>
+                    <a:pt x="214867" y="11124"/>
+                  </a:lnTo>
+                  <a:lnTo>
+                    <a:pt x="143245" y="7430"/>
+                  </a:lnTo>
+                  <a:lnTo>
+                    <a:pt x="71622" y="3722"/>
                   </a:lnTo>
                   <a:lnTo>
                     <a:pt x="0" y="0"/>
@@ -4223,312 +4223,312 @@
           </p:nvSpPr>
           <p:spPr>
             <a:xfrm>
-              <a:off x="1172049" y="3256088"/>
-              <a:ext cx="7090630" cy="2062658"/>
+              <a:off x="1172049" y="3275746"/>
+              <a:ext cx="7090630" cy="2039757"/>
             </a:xfrm>
             <a:custGeom>
               <a:avLst/>
               <a:pathLst>
-                <a:path w="7090630" h="2062658">
+                <a:path w="7090630" h="2039757">
                   <a:moveTo>
                     <a:pt x="0" y="0"/>
                   </a:moveTo>
                   <a:lnTo>
-                    <a:pt x="71622" y="52090"/>
-                  </a:lnTo>
-                  <a:lnTo>
-                    <a:pt x="143245" y="103002"/>
-                  </a:lnTo>
-                  <a:lnTo>
-                    <a:pt x="214867" y="152761"/>
-                  </a:lnTo>
-                  <a:lnTo>
-                    <a:pt x="286490" y="201393"/>
-                  </a:lnTo>
-                  <a:lnTo>
-                    <a:pt x="358112" y="248925"/>
-                  </a:lnTo>
-                  <a:lnTo>
-                    <a:pt x="429735" y="295381"/>
-                  </a:lnTo>
-                  <a:lnTo>
-                    <a:pt x="501357" y="340785"/>
-                  </a:lnTo>
-                  <a:lnTo>
-                    <a:pt x="572980" y="385162"/>
-                  </a:lnTo>
-                  <a:lnTo>
-                    <a:pt x="644602" y="428534"/>
-                  </a:lnTo>
-                  <a:lnTo>
-                    <a:pt x="716225" y="470924"/>
-                  </a:lnTo>
-                  <a:lnTo>
-                    <a:pt x="787847" y="512354"/>
-                  </a:lnTo>
-                  <a:lnTo>
-                    <a:pt x="859470" y="552847"/>
-                  </a:lnTo>
-                  <a:lnTo>
-                    <a:pt x="931092" y="592423"/>
-                  </a:lnTo>
-                  <a:lnTo>
-                    <a:pt x="1002715" y="631103"/>
-                  </a:lnTo>
-                  <a:lnTo>
-                    <a:pt x="1074337" y="668908"/>
-                  </a:lnTo>
-                  <a:lnTo>
-                    <a:pt x="1145960" y="705857"/>
-                  </a:lnTo>
-                  <a:lnTo>
-                    <a:pt x="1217582" y="741969"/>
-                  </a:lnTo>
-                  <a:lnTo>
-                    <a:pt x="1289205" y="777264"/>
-                  </a:lnTo>
-                  <a:lnTo>
-                    <a:pt x="1360827" y="811760"/>
-                  </a:lnTo>
-                  <a:lnTo>
-                    <a:pt x="1432450" y="845475"/>
-                  </a:lnTo>
-                  <a:lnTo>
-                    <a:pt x="1504073" y="878427"/>
-                  </a:lnTo>
-                  <a:lnTo>
-                    <a:pt x="1575695" y="910633"/>
-                  </a:lnTo>
-                  <a:lnTo>
-                    <a:pt x="1647318" y="942110"/>
-                  </a:lnTo>
-                  <a:lnTo>
-                    <a:pt x="1718940" y="972874"/>
-                  </a:lnTo>
-                  <a:lnTo>
-                    <a:pt x="1790563" y="1002942"/>
-                  </a:lnTo>
-                  <a:lnTo>
-                    <a:pt x="1862185" y="1032330"/>
-                  </a:lnTo>
-                  <a:lnTo>
-                    <a:pt x="1933808" y="1061052"/>
-                  </a:lnTo>
-                  <a:lnTo>
-                    <a:pt x="2005430" y="1089124"/>
-                  </a:lnTo>
-                  <a:lnTo>
-                    <a:pt x="2077053" y="1116560"/>
-                  </a:lnTo>
-                  <a:lnTo>
-                    <a:pt x="2148675" y="1143376"/>
-                  </a:lnTo>
-                  <a:lnTo>
-                    <a:pt x="2220298" y="1169584"/>
-                  </a:lnTo>
-                  <a:lnTo>
-                    <a:pt x="2291920" y="1195199"/>
-                  </a:lnTo>
-                  <a:lnTo>
-                    <a:pt x="2363543" y="1220235"/>
-                  </a:lnTo>
-                  <a:lnTo>
-                    <a:pt x="2435165" y="1244703"/>
-                  </a:lnTo>
-                  <a:lnTo>
-                    <a:pt x="2506788" y="1268618"/>
-                  </a:lnTo>
-                  <a:lnTo>
-                    <a:pt x="2578410" y="1291991"/>
-                  </a:lnTo>
-                  <a:lnTo>
-                    <a:pt x="2650033" y="1314836"/>
-                  </a:lnTo>
-                  <a:lnTo>
-                    <a:pt x="2721655" y="1337163"/>
-                  </a:lnTo>
-                  <a:lnTo>
-                    <a:pt x="2793278" y="1358984"/>
-                  </a:lnTo>
-                  <a:lnTo>
-                    <a:pt x="2864901" y="1380312"/>
-                  </a:lnTo>
-                  <a:lnTo>
-                    <a:pt x="2936523" y="1401157"/>
-                  </a:lnTo>
-                  <a:lnTo>
-                    <a:pt x="3008146" y="1421530"/>
-                  </a:lnTo>
-                  <a:lnTo>
-                    <a:pt x="3079768" y="1441442"/>
-                  </a:lnTo>
-                  <a:lnTo>
-                    <a:pt x="3151391" y="1460903"/>
-                  </a:lnTo>
-                  <a:lnTo>
-                    <a:pt x="3223013" y="1479924"/>
-                  </a:lnTo>
-                  <a:lnTo>
-                    <a:pt x="3294636" y="1498514"/>
-                  </a:lnTo>
-                  <a:lnTo>
-                    <a:pt x="3366258" y="1516683"/>
-                  </a:lnTo>
-                  <a:lnTo>
-                    <a:pt x="3437881" y="1534441"/>
-                  </a:lnTo>
-                  <a:lnTo>
-                    <a:pt x="3509503" y="1551797"/>
-                  </a:lnTo>
-                  <a:lnTo>
-                    <a:pt x="3581126" y="1568761"/>
-                  </a:lnTo>
-                  <a:lnTo>
-                    <a:pt x="3652748" y="1585340"/>
-                  </a:lnTo>
-                  <a:lnTo>
-                    <a:pt x="3724371" y="1601543"/>
-                  </a:lnTo>
-                  <a:lnTo>
-                    <a:pt x="3795993" y="1617380"/>
-                  </a:lnTo>
-                  <a:lnTo>
-                    <a:pt x="3867616" y="1632859"/>
-                  </a:lnTo>
-                  <a:lnTo>
-                    <a:pt x="3939238" y="1647987"/>
-                  </a:lnTo>
-                  <a:lnTo>
-                    <a:pt x="4010861" y="1662773"/>
-                  </a:lnTo>
-                  <a:lnTo>
-                    <a:pt x="4082483" y="1677224"/>
-                  </a:lnTo>
-                  <a:lnTo>
-                    <a:pt x="4154106" y="1691348"/>
-                  </a:lnTo>
-                  <a:lnTo>
-                    <a:pt x="4225729" y="1705152"/>
-                  </a:lnTo>
-                  <a:lnTo>
-                    <a:pt x="4297351" y="1718644"/>
-                  </a:lnTo>
-                  <a:lnTo>
-                    <a:pt x="4368974" y="1731830"/>
-                  </a:lnTo>
-                  <a:lnTo>
-                    <a:pt x="4440596" y="1744718"/>
-                  </a:lnTo>
-                  <a:lnTo>
-                    <a:pt x="4512219" y="1757314"/>
-                  </a:lnTo>
-                  <a:lnTo>
-                    <a:pt x="4583841" y="1769625"/>
-                  </a:lnTo>
-                  <a:lnTo>
-                    <a:pt x="4655464" y="1781657"/>
-                  </a:lnTo>
-                  <a:lnTo>
-                    <a:pt x="4727086" y="1793417"/>
-                  </a:lnTo>
-                  <a:lnTo>
-                    <a:pt x="4798709" y="1804910"/>
-                  </a:lnTo>
-                  <a:lnTo>
-                    <a:pt x="4870331" y="1816144"/>
-                  </a:lnTo>
-                  <a:lnTo>
-                    <a:pt x="4941954" y="1827123"/>
-                  </a:lnTo>
-                  <a:lnTo>
-                    <a:pt x="5013576" y="1837854"/>
-                  </a:lnTo>
-                  <a:lnTo>
-                    <a:pt x="5085199" y="1848341"/>
-                  </a:lnTo>
-                  <a:lnTo>
-                    <a:pt x="5156821" y="1858592"/>
-                  </a:lnTo>
-                  <a:lnTo>
-                    <a:pt x="5228444" y="1868610"/>
-                  </a:lnTo>
-                  <a:lnTo>
-                    <a:pt x="5300066" y="1878401"/>
-                  </a:lnTo>
-                  <a:lnTo>
-                    <a:pt x="5371689" y="1887971"/>
-                  </a:lnTo>
-                  <a:lnTo>
-                    <a:pt x="5443311" y="1897325"/>
-                  </a:lnTo>
-                  <a:lnTo>
-                    <a:pt x="5514934" y="1906466"/>
-                  </a:lnTo>
-                  <a:lnTo>
-                    <a:pt x="5586557" y="1915401"/>
-                  </a:lnTo>
-                  <a:lnTo>
-                    <a:pt x="5658179" y="1924133"/>
-                  </a:lnTo>
-                  <a:lnTo>
-                    <a:pt x="5729802" y="1932668"/>
-                  </a:lnTo>
-                  <a:lnTo>
-                    <a:pt x="5801424" y="1941009"/>
-                  </a:lnTo>
-                  <a:lnTo>
-                    <a:pt x="5873047" y="1949162"/>
-                  </a:lnTo>
-                  <a:lnTo>
-                    <a:pt x="5944669" y="1957130"/>
-                  </a:lnTo>
-                  <a:lnTo>
-                    <a:pt x="6016292" y="1964918"/>
-                  </a:lnTo>
-                  <a:lnTo>
-                    <a:pt x="6087914" y="1972529"/>
-                  </a:lnTo>
-                  <a:lnTo>
-                    <a:pt x="6159537" y="1979968"/>
-                  </a:lnTo>
-                  <a:lnTo>
-                    <a:pt x="6231159" y="1987239"/>
-                  </a:lnTo>
-                  <a:lnTo>
-                    <a:pt x="6302782" y="1994345"/>
-                  </a:lnTo>
-                  <a:lnTo>
-                    <a:pt x="6374404" y="2001290"/>
-                  </a:lnTo>
-                  <a:lnTo>
-                    <a:pt x="6446027" y="2008078"/>
-                  </a:lnTo>
-                  <a:lnTo>
-                    <a:pt x="6517649" y="2014713"/>
-                  </a:lnTo>
-                  <a:lnTo>
-                    <a:pt x="6589272" y="2021197"/>
-                  </a:lnTo>
-                  <a:lnTo>
-                    <a:pt x="6660894" y="2027535"/>
-                  </a:lnTo>
-                  <a:lnTo>
-                    <a:pt x="6732517" y="2033729"/>
-                  </a:lnTo>
-                  <a:lnTo>
-                    <a:pt x="6804139" y="2039782"/>
-                  </a:lnTo>
-                  <a:lnTo>
-                    <a:pt x="6875762" y="2045699"/>
-                  </a:lnTo>
-                  <a:lnTo>
-                    <a:pt x="6947385" y="2051482"/>
-                  </a:lnTo>
-                  <a:lnTo>
-                    <a:pt x="7019007" y="2057134"/>
-                  </a:lnTo>
-                  <a:lnTo>
-                    <a:pt x="7090630" y="2062658"/>
+                    <a:pt x="71622" y="51148"/>
+                  </a:lnTo>
+                  <a:lnTo>
+                    <a:pt x="143245" y="101149"/>
+                  </a:lnTo>
+                  <a:lnTo>
+                    <a:pt x="214867" y="150030"/>
+                  </a:lnTo>
+                  <a:lnTo>
+                    <a:pt x="286490" y="197815"/>
+                  </a:lnTo>
+                  <a:lnTo>
+                    <a:pt x="358112" y="244528"/>
+                  </a:lnTo>
+                  <a:lnTo>
+                    <a:pt x="429735" y="290194"/>
+                  </a:lnTo>
+                  <a:lnTo>
+                    <a:pt x="501357" y="334837"/>
+                  </a:lnTo>
+                  <a:lnTo>
+                    <a:pt x="572980" y="378478"/>
+                  </a:lnTo>
+                  <a:lnTo>
+                    <a:pt x="644602" y="421142"/>
+                  </a:lnTo>
+                  <a:lnTo>
+                    <a:pt x="716225" y="462848"/>
+                  </a:lnTo>
+                  <a:lnTo>
+                    <a:pt x="787847" y="503620"/>
+                  </a:lnTo>
+                  <a:lnTo>
+                    <a:pt x="859470" y="543478"/>
+                  </a:lnTo>
+                  <a:lnTo>
+                    <a:pt x="931092" y="582442"/>
+                  </a:lnTo>
+                  <a:lnTo>
+                    <a:pt x="1002715" y="620533"/>
+                  </a:lnTo>
+                  <a:lnTo>
+                    <a:pt x="1074337" y="657769"/>
+                  </a:lnTo>
+                  <a:lnTo>
+                    <a:pt x="1145960" y="694171"/>
+                  </a:lnTo>
+                  <a:lnTo>
+                    <a:pt x="1217582" y="729757"/>
+                  </a:lnTo>
+                  <a:lnTo>
+                    <a:pt x="1289205" y="764545"/>
+                  </a:lnTo>
+                  <a:lnTo>
+                    <a:pt x="1360827" y="798553"/>
+                  </a:lnTo>
+                  <a:lnTo>
+                    <a:pt x="1432450" y="831799"/>
+                  </a:lnTo>
+                  <a:lnTo>
+                    <a:pt x="1504073" y="864299"/>
+                  </a:lnTo>
+                  <a:lnTo>
+                    <a:pt x="1575695" y="896071"/>
+                  </a:lnTo>
+                  <a:lnTo>
+                    <a:pt x="1647318" y="927131"/>
+                  </a:lnTo>
+                  <a:lnTo>
+                    <a:pt x="1718940" y="957494"/>
+                  </a:lnTo>
+                  <a:lnTo>
+                    <a:pt x="1790563" y="987176"/>
+                  </a:lnTo>
+                  <a:lnTo>
+                    <a:pt x="1862185" y="1016193"/>
+                  </a:lnTo>
+                  <a:lnTo>
+                    <a:pt x="1933808" y="1044560"/>
+                  </a:lnTo>
+                  <a:lnTo>
+                    <a:pt x="2005430" y="1072291"/>
+                  </a:lnTo>
+                  <a:lnTo>
+                    <a:pt x="2077053" y="1099399"/>
+                  </a:lnTo>
+                  <a:lnTo>
+                    <a:pt x="2148675" y="1125901"/>
+                  </a:lnTo>
+                  <a:lnTo>
+                    <a:pt x="2220298" y="1151808"/>
+                  </a:lnTo>
+                  <a:lnTo>
+                    <a:pt x="2291920" y="1177134"/>
+                  </a:lnTo>
+                  <a:lnTo>
+                    <a:pt x="2363543" y="1201892"/>
+                  </a:lnTo>
+                  <a:lnTo>
+                    <a:pt x="2435165" y="1226096"/>
+                  </a:lnTo>
+                  <a:lnTo>
+                    <a:pt x="2506788" y="1249757"/>
+                  </a:lnTo>
+                  <a:lnTo>
+                    <a:pt x="2578410" y="1272887"/>
+                  </a:lnTo>
+                  <a:lnTo>
+                    <a:pt x="2650033" y="1295499"/>
+                  </a:lnTo>
+                  <a:lnTo>
+                    <a:pt x="2721655" y="1317604"/>
+                  </a:lnTo>
+                  <a:lnTo>
+                    <a:pt x="2793278" y="1339213"/>
+                  </a:lnTo>
+                  <a:lnTo>
+                    <a:pt x="2864901" y="1360338"/>
+                  </a:lnTo>
+                  <a:lnTo>
+                    <a:pt x="2936523" y="1380989"/>
+                  </a:lnTo>
+                  <a:lnTo>
+                    <a:pt x="3008146" y="1401177"/>
+                  </a:lnTo>
+                  <a:lnTo>
+                    <a:pt x="3079768" y="1420913"/>
+                  </a:lnTo>
+                  <a:lnTo>
+                    <a:pt x="3151391" y="1440206"/>
+                  </a:lnTo>
+                  <a:lnTo>
+                    <a:pt x="3223013" y="1459067"/>
+                  </a:lnTo>
+                  <a:lnTo>
+                    <a:pt x="3294636" y="1477505"/>
+                  </a:lnTo>
+                  <a:lnTo>
+                    <a:pt x="3366258" y="1495529"/>
+                  </a:lnTo>
+                  <a:lnTo>
+                    <a:pt x="3437881" y="1513150"/>
+                  </a:lnTo>
+                  <a:lnTo>
+                    <a:pt x="3509503" y="1530375"/>
+                  </a:lnTo>
+                  <a:lnTo>
+                    <a:pt x="3581126" y="1547215"/>
+                  </a:lnTo>
+                  <a:lnTo>
+                    <a:pt x="3652748" y="1563676"/>
+                  </a:lnTo>
+                  <a:lnTo>
+                    <a:pt x="3724371" y="1579769"/>
+                  </a:lnTo>
+                  <a:lnTo>
+                    <a:pt x="3795993" y="1595501"/>
+                  </a:lnTo>
+                  <a:lnTo>
+                    <a:pt x="3867616" y="1610880"/>
+                  </a:lnTo>
+                  <a:lnTo>
+                    <a:pt x="3939238" y="1625915"/>
+                  </a:lnTo>
+                  <a:lnTo>
+                    <a:pt x="4010861" y="1640612"/>
+                  </a:lnTo>
+                  <a:lnTo>
+                    <a:pt x="4082483" y="1654980"/>
+                  </a:lnTo>
+                  <a:lnTo>
+                    <a:pt x="4154106" y="1669026"/>
+                  </a:lnTo>
+                  <a:lnTo>
+                    <a:pt x="4225729" y="1682757"/>
+                  </a:lnTo>
+                  <a:lnTo>
+                    <a:pt x="4297351" y="1696180"/>
+                  </a:lnTo>
+                  <a:lnTo>
+                    <a:pt x="4368974" y="1709302"/>
+                  </a:lnTo>
+                  <a:lnTo>
+                    <a:pt x="4440596" y="1722130"/>
+                  </a:lnTo>
+                  <a:lnTo>
+                    <a:pt x="4512219" y="1734670"/>
+                  </a:lnTo>
+                  <a:lnTo>
+                    <a:pt x="4583841" y="1746930"/>
+                  </a:lnTo>
+                  <a:lnTo>
+                    <a:pt x="4655464" y="1758914"/>
+                  </a:lnTo>
+                  <a:lnTo>
+                    <a:pt x="4727086" y="1770630"/>
+                  </a:lnTo>
+                  <a:lnTo>
+                    <a:pt x="4798709" y="1782083"/>
+                  </a:lnTo>
+                  <a:lnTo>
+                    <a:pt x="4870331" y="1793279"/>
+                  </a:lnTo>
+                  <a:lnTo>
+                    <a:pt x="4941954" y="1804224"/>
+                  </a:lnTo>
+                  <a:lnTo>
+                    <a:pt x="5013576" y="1814924"/>
+                  </a:lnTo>
+                  <a:lnTo>
+                    <a:pt x="5085199" y="1825384"/>
+                  </a:lnTo>
+                  <a:lnTo>
+                    <a:pt x="5156821" y="1835610"/>
+                  </a:lnTo>
+                  <a:lnTo>
+                    <a:pt x="5228444" y="1845606"/>
+                  </a:lnTo>
+                  <a:lnTo>
+                    <a:pt x="5300066" y="1855379"/>
+                  </a:lnTo>
+                  <a:lnTo>
+                    <a:pt x="5371689" y="1864932"/>
+                  </a:lnTo>
+                  <a:lnTo>
+                    <a:pt x="5443311" y="1874271"/>
+                  </a:lnTo>
+                  <a:lnTo>
+                    <a:pt x="5514934" y="1883400"/>
+                  </a:lnTo>
+                  <a:lnTo>
+                    <a:pt x="5586557" y="1892325"/>
+                  </a:lnTo>
+                  <a:lnTo>
+                    <a:pt x="5658179" y="1901050"/>
+                  </a:lnTo>
+                  <a:lnTo>
+                    <a:pt x="5729802" y="1909579"/>
+                  </a:lnTo>
+                  <a:lnTo>
+                    <a:pt x="5801424" y="1917917"/>
+                  </a:lnTo>
+                  <a:lnTo>
+                    <a:pt x="5873047" y="1926068"/>
+                  </a:lnTo>
+                  <a:lnTo>
+                    <a:pt x="5944669" y="1934037"/>
+                  </a:lnTo>
+                  <a:lnTo>
+                    <a:pt x="6016292" y="1941826"/>
+                  </a:lnTo>
+                  <a:lnTo>
+                    <a:pt x="6087914" y="1949441"/>
+                  </a:lnTo>
+                  <a:lnTo>
+                    <a:pt x="6159537" y="1956886"/>
+                  </a:lnTo>
+                  <a:lnTo>
+                    <a:pt x="6231159" y="1964163"/>
+                  </a:lnTo>
+                  <a:lnTo>
+                    <a:pt x="6302782" y="1971278"/>
+                  </a:lnTo>
+                  <a:lnTo>
+                    <a:pt x="6374404" y="1978232"/>
+                  </a:lnTo>
+                  <a:lnTo>
+                    <a:pt x="6446027" y="1985031"/>
+                  </a:lnTo>
+                  <a:lnTo>
+                    <a:pt x="6517649" y="1991678"/>
+                  </a:lnTo>
+                  <a:lnTo>
+                    <a:pt x="6589272" y="1998175"/>
+                  </a:lnTo>
+                  <a:lnTo>
+                    <a:pt x="6660894" y="2004527"/>
+                  </a:lnTo>
+                  <a:lnTo>
+                    <a:pt x="6732517" y="2010737"/>
+                  </a:lnTo>
+                  <a:lnTo>
+                    <a:pt x="6804139" y="2016807"/>
+                  </a:lnTo>
+                  <a:lnTo>
+                    <a:pt x="6875762" y="2022741"/>
+                  </a:lnTo>
+                  <a:lnTo>
+                    <a:pt x="6947385" y="2028542"/>
+                  </a:lnTo>
+                  <a:lnTo>
+                    <a:pt x="7019007" y="2034213"/>
+                  </a:lnTo>
+                  <a:lnTo>
+                    <a:pt x="7090630" y="2039757"/>
                   </a:lnTo>
                 </a:path>
               </a:pathLst>
@@ -4600,7 +4600,7 @@
           </p:nvSpPr>
           <p:spPr>
             <a:xfrm>
-              <a:off x="4363883" y="2073503"/>
+              <a:off x="4368185" y="2073503"/>
               <a:ext cx="0" cy="3649639"/>
             </a:xfrm>
             <a:custGeom>
@@ -4643,7 +4643,7 @@
           </p:nvSpPr>
           <p:spPr>
             <a:xfrm>
-              <a:off x="3178931" y="2073503"/>
+              <a:off x="3176242" y="2073503"/>
               <a:ext cx="0" cy="3649639"/>
             </a:xfrm>
             <a:custGeom>
@@ -4686,7 +4686,7 @@
           </p:nvSpPr>
           <p:spPr>
             <a:xfrm>
-              <a:off x="5373904" y="2073503"/>
+              <a:off x="5386913" y="2073503"/>
               <a:ext cx="0" cy="3649639"/>
             </a:xfrm>
             <a:custGeom>
@@ -4959,7 +4959,7 @@
           </p:nvSpPr>
           <p:spPr>
             <a:xfrm>
-              <a:off x="1536080" y="5785772"/>
+              <a:off x="1536741" y="5785772"/>
               <a:ext cx="161574" cy="80101"/>
             </a:xfrm>
             <a:prstGeom prst="rect">
@@ -5005,7 +5005,7 @@
           </p:nvSpPr>
           <p:spPr>
             <a:xfrm>
-              <a:off x="3342736" y="5785772"/>
+              <a:off x="3341771" y="5785772"/>
               <a:ext cx="161574" cy="80101"/>
             </a:xfrm>
             <a:prstGeom prst="rect">
@@ -5051,7 +5051,7 @@
           </p:nvSpPr>
           <p:spPr>
             <a:xfrm>
-              <a:off x="5199088" y="5785772"/>
+              <a:off x="5196500" y="5785772"/>
               <a:ext cx="62179" cy="80101"/>
             </a:xfrm>
             <a:prstGeom prst="rect">
@@ -5097,7 +5097,7 @@
           </p:nvSpPr>
           <p:spPr>
             <a:xfrm>
-              <a:off x="6974654" y="5785772"/>
+              <a:off x="6970441" y="5785772"/>
               <a:ext cx="124358" cy="80101"/>
             </a:xfrm>
             <a:prstGeom prst="rect">
@@ -5268,7 +5268,7 @@
                   <a:latin typeface="Helvetica"/>
                   <a:cs typeface="Helvetica"/>
                 </a:rPr>
-                <a:t>subHR per 10 % decline: 1.33 (1.06-1.69), p_Bonf = 0.097 (n = 6)  |  per IQR decline (Δ = 24.3 %): 2.02 (1.14-3.57)  |  IQR: [-22.7, 1.6] %</a:t>
+                <a:t>subHR per 10 % decline: 1.33 (1.05-1.69), p_Bonf = 0.111 (n = 6)  |  per IQR decline (Δ = 24.5 %): 2.01 (1.12-3.61)  |  IQR: [-22.7, 1.8] %</a:t>
               </a:r>
             </a:p>
           </p:txBody>
